--- a/docs/reports/CST/2026 - CSI/Slides.pptx
+++ b/docs/reports/CST/2026 - CSI/Slides.pptx
@@ -5,22 +5,22 @@
     <p:sldMasterId id="2147483648" r:id="rId1"/>
   </p:sldMasterIdLst>
   <p:sldIdLst>
-    <p:sldId id="256" r:id="rId7"/>
-    <p:sldId id="257" r:id="rId8"/>
-    <p:sldId id="258" r:id="rId9"/>
-    <p:sldId id="259" r:id="rId10"/>
-    <p:sldId id="260" r:id="rId11"/>
-    <p:sldId id="261" r:id="rId12"/>
-    <p:sldId id="262" r:id="rId13"/>
-    <p:sldId id="263" r:id="rId14"/>
-    <p:sldId id="264" r:id="rId15"/>
-    <p:sldId id="265" r:id="rId16"/>
-    <p:sldId id="266" r:id="rId17"/>
-    <p:sldId id="267" r:id="rId18"/>
-    <p:sldId id="268" r:id="rId19"/>
-    <p:sldId id="269" r:id="rId20"/>
+    <p:sldId id="256" r:id="rId2"/>
+    <p:sldId id="257" r:id="rId3"/>
+    <p:sldId id="258" r:id="rId4"/>
+    <p:sldId id="259" r:id="rId5"/>
+    <p:sldId id="260" r:id="rId6"/>
+    <p:sldId id="261" r:id="rId7"/>
+    <p:sldId id="262" r:id="rId8"/>
+    <p:sldId id="263" r:id="rId9"/>
+    <p:sldId id="264" r:id="rId10"/>
+    <p:sldId id="265" r:id="rId11"/>
+    <p:sldId id="266" r:id="rId12"/>
+    <p:sldId id="267" r:id="rId13"/>
+    <p:sldId id="268" r:id="rId14"/>
+    <p:sldId id="269" r:id="rId15"/>
   </p:sldIdLst>
-  <p:sldSz cx="12191695" cy="6858000" type="screen4x3"/>
+  <p:sldSz cx="12192000" cy="6858000"/>
   <p:notesSz cx="6858000" cy="9144000"/>
   <p:defaultTextStyle>
     <a:defPPr>
@@ -117,6 +117,22 @@
       </a:defRPr>
     </a:lvl9pPr>
   </p:defaultTextStyle>
+  <p:extLst>
+    <p:ext uri="{EFAFB233-063F-42B5-8137-9DF3F51BA10A}">
+      <p15:sldGuideLst xmlns:p15="http://schemas.microsoft.com/office/powerpoint/2012/main">
+        <p15:guide id="1" orient="horz" pos="2160">
+          <p15:clr>
+            <a:srgbClr val="A4A3A4"/>
+          </p15:clr>
+        </p15:guide>
+        <p15:guide id="2" pos="2880">
+          <p15:clr>
+            <a:srgbClr val="A4A3A4"/>
+          </p15:clr>
+        </p15:guide>
+      </p15:sldGuideLst>
+    </p:ext>
+  </p:extLst>
 </p:presentation>
 </file>
 
@@ -158,10 +174,9 @@
           <a:lstStyle/>
           <a:p>
             <a:r>
-              <a:rPr lang="en-US" smtClean="0"/>
+              <a:rPr lang="en-US"/>
               <a:t>Click to edit Master title style</a:t>
             </a:r>
-            <a:endParaRPr lang="en-US"/>
           </a:p>
         </p:txBody>
       </p:sp>
@@ -277,10 +292,9 @@
           </a:lstStyle>
           <a:p>
             <a:r>
-              <a:rPr lang="en-US" smtClean="0"/>
+              <a:rPr lang="en-US"/>
               <a:t>Click to edit Master subtitle style</a:t>
             </a:r>
-            <a:endParaRPr lang="en-US"/>
           </a:p>
         </p:txBody>
       </p:sp>
@@ -301,7 +315,7 @@
           <a:p>
             <a:fld id="{5BCAD085-E8A6-8845-BD4E-CB4CCA059FC4}" type="datetimeFigureOut">
               <a:rPr lang="en-US" smtClean="0"/>
-              <a:t>1/27/13</a:t>
+              <a:t>9/14/2026</a:t>
             </a:fld>
             <a:endParaRPr lang="en-US"/>
           </a:p>
@@ -395,10 +409,9 @@
           <a:lstStyle/>
           <a:p>
             <a:r>
-              <a:rPr lang="en-US" smtClean="0"/>
+              <a:rPr lang="en-US"/>
               <a:t>Click to edit Master title style</a:t>
             </a:r>
-            <a:endParaRPr lang="en-US"/>
           </a:p>
         </p:txBody>
       </p:sp>
@@ -419,38 +432,37 @@
           <a:p>
             <a:pPr lvl="0"/>
             <a:r>
-              <a:rPr lang="en-US" smtClean="0"/>
+              <a:rPr lang="en-US"/>
               <a:t>Click to edit Master text styles</a:t>
             </a:r>
           </a:p>
           <a:p>
             <a:pPr lvl="1"/>
             <a:r>
-              <a:rPr lang="en-US" smtClean="0"/>
+              <a:rPr lang="en-US"/>
               <a:t>Second level</a:t>
             </a:r>
           </a:p>
           <a:p>
             <a:pPr lvl="2"/>
             <a:r>
-              <a:rPr lang="en-US" smtClean="0"/>
+              <a:rPr lang="en-US"/>
               <a:t>Third level</a:t>
             </a:r>
           </a:p>
           <a:p>
             <a:pPr lvl="3"/>
             <a:r>
-              <a:rPr lang="en-US" smtClean="0"/>
+              <a:rPr lang="en-US"/>
               <a:t>Fourth level</a:t>
             </a:r>
           </a:p>
           <a:p>
             <a:pPr lvl="4"/>
             <a:r>
-              <a:rPr lang="en-US" smtClean="0"/>
+              <a:rPr lang="en-US"/>
               <a:t>Fifth level</a:t>
             </a:r>
-            <a:endParaRPr lang="en-US"/>
           </a:p>
         </p:txBody>
       </p:sp>
@@ -471,7 +483,7 @@
           <a:p>
             <a:fld id="{5BCAD085-E8A6-8845-BD4E-CB4CCA059FC4}" type="datetimeFigureOut">
               <a:rPr lang="en-US" smtClean="0"/>
-              <a:t>1/27/13</a:t>
+              <a:t>9/14/2026</a:t>
             </a:fld>
             <a:endParaRPr lang="en-US"/>
           </a:p>
@@ -570,10 +582,9 @@
           <a:lstStyle/>
           <a:p>
             <a:r>
-              <a:rPr lang="en-US" smtClean="0"/>
+              <a:rPr lang="en-US"/>
               <a:t>Click to edit Master title style</a:t>
             </a:r>
-            <a:endParaRPr lang="en-US"/>
           </a:p>
         </p:txBody>
       </p:sp>
@@ -599,38 +610,37 @@
           <a:p>
             <a:pPr lvl="0"/>
             <a:r>
-              <a:rPr lang="en-US" smtClean="0"/>
+              <a:rPr lang="en-US"/>
               <a:t>Click to edit Master text styles</a:t>
             </a:r>
           </a:p>
           <a:p>
             <a:pPr lvl="1"/>
             <a:r>
-              <a:rPr lang="en-US" smtClean="0"/>
+              <a:rPr lang="en-US"/>
               <a:t>Second level</a:t>
             </a:r>
           </a:p>
           <a:p>
             <a:pPr lvl="2"/>
             <a:r>
-              <a:rPr lang="en-US" smtClean="0"/>
+              <a:rPr lang="en-US"/>
               <a:t>Third level</a:t>
             </a:r>
           </a:p>
           <a:p>
             <a:pPr lvl="3"/>
             <a:r>
-              <a:rPr lang="en-US" smtClean="0"/>
+              <a:rPr lang="en-US"/>
               <a:t>Fourth level</a:t>
             </a:r>
           </a:p>
           <a:p>
             <a:pPr lvl="4"/>
             <a:r>
-              <a:rPr lang="en-US" smtClean="0"/>
+              <a:rPr lang="en-US"/>
               <a:t>Fifth level</a:t>
             </a:r>
-            <a:endParaRPr lang="en-US"/>
           </a:p>
         </p:txBody>
       </p:sp>
@@ -651,7 +661,7 @@
           <a:p>
             <a:fld id="{5BCAD085-E8A6-8845-BD4E-CB4CCA059FC4}" type="datetimeFigureOut">
               <a:rPr lang="en-US" smtClean="0"/>
-              <a:t>1/27/13</a:t>
+              <a:t>9/14/2026</a:t>
             </a:fld>
             <a:endParaRPr lang="en-US"/>
           </a:p>
@@ -745,10 +755,9 @@
           <a:lstStyle/>
           <a:p>
             <a:r>
-              <a:rPr lang="en-US" smtClean="0"/>
+              <a:rPr lang="en-US"/>
               <a:t>Click to edit Master title style</a:t>
             </a:r>
-            <a:endParaRPr lang="en-US"/>
           </a:p>
         </p:txBody>
       </p:sp>
@@ -769,38 +778,37 @@
           <a:p>
             <a:pPr lvl="0"/>
             <a:r>
-              <a:rPr lang="en-US" smtClean="0"/>
+              <a:rPr lang="en-US"/>
               <a:t>Click to edit Master text styles</a:t>
             </a:r>
           </a:p>
           <a:p>
             <a:pPr lvl="1"/>
             <a:r>
-              <a:rPr lang="en-US" smtClean="0"/>
+              <a:rPr lang="en-US"/>
               <a:t>Second level</a:t>
             </a:r>
           </a:p>
           <a:p>
             <a:pPr lvl="2"/>
             <a:r>
-              <a:rPr lang="en-US" smtClean="0"/>
+              <a:rPr lang="en-US"/>
               <a:t>Third level</a:t>
             </a:r>
           </a:p>
           <a:p>
             <a:pPr lvl="3"/>
             <a:r>
-              <a:rPr lang="en-US" smtClean="0"/>
+              <a:rPr lang="en-US"/>
               <a:t>Fourth level</a:t>
             </a:r>
           </a:p>
           <a:p>
             <a:pPr lvl="4"/>
             <a:r>
-              <a:rPr lang="en-US" smtClean="0"/>
+              <a:rPr lang="en-US"/>
               <a:t>Fifth level</a:t>
             </a:r>
-            <a:endParaRPr lang="en-US"/>
           </a:p>
         </p:txBody>
       </p:sp>
@@ -821,7 +829,7 @@
           <a:p>
             <a:fld id="{5BCAD085-E8A6-8845-BD4E-CB4CCA059FC4}" type="datetimeFigureOut">
               <a:rPr lang="en-US" smtClean="0"/>
-              <a:t>1/27/13</a:t>
+              <a:t>9/14/2026</a:t>
             </a:fld>
             <a:endParaRPr lang="en-US"/>
           </a:p>
@@ -924,10 +932,9 @@
           </a:lstStyle>
           <a:p>
             <a:r>
-              <a:rPr lang="en-US" smtClean="0"/>
+              <a:rPr lang="en-US"/>
               <a:t>Click to edit Master title style</a:t>
             </a:r>
-            <a:endParaRPr lang="en-US"/>
           </a:p>
         </p:txBody>
       </p:sp>
@@ -1044,7 +1051,7 @@
           <a:p>
             <a:pPr lvl="0"/>
             <a:r>
-              <a:rPr lang="en-US" smtClean="0"/>
+              <a:rPr lang="en-US"/>
               <a:t>Click to edit Master text styles</a:t>
             </a:r>
           </a:p>
@@ -1067,7 +1074,7 @@
           <a:p>
             <a:fld id="{5BCAD085-E8A6-8845-BD4E-CB4CCA059FC4}" type="datetimeFigureOut">
               <a:rPr lang="en-US" smtClean="0"/>
-              <a:t>1/27/13</a:t>
+              <a:t>9/14/2026</a:t>
             </a:fld>
             <a:endParaRPr lang="en-US"/>
           </a:p>
@@ -1161,10 +1168,9 @@
           <a:lstStyle/>
           <a:p>
             <a:r>
-              <a:rPr lang="en-US" smtClean="0"/>
+              <a:rPr lang="en-US"/>
               <a:t>Click to edit Master title style</a:t>
             </a:r>
-            <a:endParaRPr lang="en-US"/>
           </a:p>
         </p:txBody>
       </p:sp>
@@ -1218,38 +1224,37 @@
           <a:p>
             <a:pPr lvl="0"/>
             <a:r>
-              <a:rPr lang="en-US" smtClean="0"/>
+              <a:rPr lang="en-US"/>
               <a:t>Click to edit Master text styles</a:t>
             </a:r>
           </a:p>
           <a:p>
             <a:pPr lvl="1"/>
             <a:r>
-              <a:rPr lang="en-US" smtClean="0"/>
+              <a:rPr lang="en-US"/>
               <a:t>Second level</a:t>
             </a:r>
           </a:p>
           <a:p>
             <a:pPr lvl="2"/>
             <a:r>
-              <a:rPr lang="en-US" smtClean="0"/>
+              <a:rPr lang="en-US"/>
               <a:t>Third level</a:t>
             </a:r>
           </a:p>
           <a:p>
             <a:pPr lvl="3"/>
             <a:r>
-              <a:rPr lang="en-US" smtClean="0"/>
+              <a:rPr lang="en-US"/>
               <a:t>Fourth level</a:t>
             </a:r>
           </a:p>
           <a:p>
             <a:pPr lvl="4"/>
             <a:r>
-              <a:rPr lang="en-US" smtClean="0"/>
+              <a:rPr lang="en-US"/>
               <a:t>Fifth level</a:t>
             </a:r>
-            <a:endParaRPr lang="en-US"/>
           </a:p>
         </p:txBody>
       </p:sp>
@@ -1303,38 +1308,37 @@
           <a:p>
             <a:pPr lvl="0"/>
             <a:r>
-              <a:rPr lang="en-US" smtClean="0"/>
+              <a:rPr lang="en-US"/>
               <a:t>Click to edit Master text styles</a:t>
             </a:r>
           </a:p>
           <a:p>
             <a:pPr lvl="1"/>
             <a:r>
-              <a:rPr lang="en-US" smtClean="0"/>
+              <a:rPr lang="en-US"/>
               <a:t>Second level</a:t>
             </a:r>
           </a:p>
           <a:p>
             <a:pPr lvl="2"/>
             <a:r>
-              <a:rPr lang="en-US" smtClean="0"/>
+              <a:rPr lang="en-US"/>
               <a:t>Third level</a:t>
             </a:r>
           </a:p>
           <a:p>
             <a:pPr lvl="3"/>
             <a:r>
-              <a:rPr lang="en-US" smtClean="0"/>
+              <a:rPr lang="en-US"/>
               <a:t>Fourth level</a:t>
             </a:r>
           </a:p>
           <a:p>
             <a:pPr lvl="4"/>
             <a:r>
-              <a:rPr lang="en-US" smtClean="0"/>
+              <a:rPr lang="en-US"/>
               <a:t>Fifth level</a:t>
             </a:r>
-            <a:endParaRPr lang="en-US"/>
           </a:p>
         </p:txBody>
       </p:sp>
@@ -1355,7 +1359,7 @@
           <a:p>
             <a:fld id="{5BCAD085-E8A6-8845-BD4E-CB4CCA059FC4}" type="datetimeFigureOut">
               <a:rPr lang="en-US" smtClean="0"/>
-              <a:t>1/27/13</a:t>
+              <a:t>9/14/2026</a:t>
             </a:fld>
             <a:endParaRPr lang="en-US"/>
           </a:p>
@@ -1453,10 +1457,9 @@
           </a:lstStyle>
           <a:p>
             <a:r>
-              <a:rPr lang="en-US" smtClean="0"/>
+              <a:rPr lang="en-US"/>
               <a:t>Click to edit Master title style</a:t>
             </a:r>
-            <a:endParaRPr lang="en-US"/>
           </a:p>
         </p:txBody>
       </p:sp>
@@ -1519,7 +1522,7 @@
           <a:p>
             <a:pPr lvl="0"/>
             <a:r>
-              <a:rPr lang="en-US" smtClean="0"/>
+              <a:rPr lang="en-US"/>
               <a:t>Click to edit Master text styles</a:t>
             </a:r>
           </a:p>
@@ -1575,38 +1578,37 @@
           <a:p>
             <a:pPr lvl="0"/>
             <a:r>
-              <a:rPr lang="en-US" smtClean="0"/>
+              <a:rPr lang="en-US"/>
               <a:t>Click to edit Master text styles</a:t>
             </a:r>
           </a:p>
           <a:p>
             <a:pPr lvl="1"/>
             <a:r>
-              <a:rPr lang="en-US" smtClean="0"/>
+              <a:rPr lang="en-US"/>
               <a:t>Second level</a:t>
             </a:r>
           </a:p>
           <a:p>
             <a:pPr lvl="2"/>
             <a:r>
-              <a:rPr lang="en-US" smtClean="0"/>
+              <a:rPr lang="en-US"/>
               <a:t>Third level</a:t>
             </a:r>
           </a:p>
           <a:p>
             <a:pPr lvl="3"/>
             <a:r>
-              <a:rPr lang="en-US" smtClean="0"/>
+              <a:rPr lang="en-US"/>
               <a:t>Fourth level</a:t>
             </a:r>
           </a:p>
           <a:p>
             <a:pPr lvl="4"/>
             <a:r>
-              <a:rPr lang="en-US" smtClean="0"/>
+              <a:rPr lang="en-US"/>
               <a:t>Fifth level</a:t>
             </a:r>
-            <a:endParaRPr lang="en-US"/>
           </a:p>
         </p:txBody>
       </p:sp>
@@ -1669,7 +1671,7 @@
           <a:p>
             <a:pPr lvl="0"/>
             <a:r>
-              <a:rPr lang="en-US" smtClean="0"/>
+              <a:rPr lang="en-US"/>
               <a:t>Click to edit Master text styles</a:t>
             </a:r>
           </a:p>
@@ -1725,38 +1727,37 @@
           <a:p>
             <a:pPr lvl="0"/>
             <a:r>
-              <a:rPr lang="en-US" smtClean="0"/>
+              <a:rPr lang="en-US"/>
               <a:t>Click to edit Master text styles</a:t>
             </a:r>
           </a:p>
           <a:p>
             <a:pPr lvl="1"/>
             <a:r>
-              <a:rPr lang="en-US" smtClean="0"/>
+              <a:rPr lang="en-US"/>
               <a:t>Second level</a:t>
             </a:r>
           </a:p>
           <a:p>
             <a:pPr lvl="2"/>
             <a:r>
-              <a:rPr lang="en-US" smtClean="0"/>
+              <a:rPr lang="en-US"/>
               <a:t>Third level</a:t>
             </a:r>
           </a:p>
           <a:p>
             <a:pPr lvl="3"/>
             <a:r>
-              <a:rPr lang="en-US" smtClean="0"/>
+              <a:rPr lang="en-US"/>
               <a:t>Fourth level</a:t>
             </a:r>
           </a:p>
           <a:p>
             <a:pPr lvl="4"/>
             <a:r>
-              <a:rPr lang="en-US" smtClean="0"/>
+              <a:rPr lang="en-US"/>
               <a:t>Fifth level</a:t>
             </a:r>
-            <a:endParaRPr lang="en-US"/>
           </a:p>
         </p:txBody>
       </p:sp>
@@ -1777,7 +1778,7 @@
           <a:p>
             <a:fld id="{5BCAD085-E8A6-8845-BD4E-CB4CCA059FC4}" type="datetimeFigureOut">
               <a:rPr lang="en-US" smtClean="0"/>
-              <a:t>1/27/13</a:t>
+              <a:t>9/14/2026</a:t>
             </a:fld>
             <a:endParaRPr lang="en-US"/>
           </a:p>
@@ -1871,10 +1872,9 @@
           <a:lstStyle/>
           <a:p>
             <a:r>
-              <a:rPr lang="en-US" smtClean="0"/>
+              <a:rPr lang="en-US"/>
               <a:t>Click to edit Master title style</a:t>
             </a:r>
-            <a:endParaRPr lang="en-US"/>
           </a:p>
         </p:txBody>
       </p:sp>
@@ -1895,7 +1895,7 @@
           <a:p>
             <a:fld id="{5BCAD085-E8A6-8845-BD4E-CB4CCA059FC4}" type="datetimeFigureOut">
               <a:rPr lang="en-US" smtClean="0"/>
-              <a:t>1/27/13</a:t>
+              <a:t>9/14/2026</a:t>
             </a:fld>
             <a:endParaRPr lang="en-US"/>
           </a:p>
@@ -1990,7 +1990,7 @@
           <a:p>
             <a:fld id="{5BCAD085-E8A6-8845-BD4E-CB4CCA059FC4}" type="datetimeFigureOut">
               <a:rPr lang="en-US" smtClean="0"/>
-              <a:t>1/27/13</a:t>
+              <a:t>9/14/2026</a:t>
             </a:fld>
             <a:endParaRPr lang="en-US"/>
           </a:p>
@@ -2093,10 +2093,9 @@
           </a:lstStyle>
           <a:p>
             <a:r>
-              <a:rPr lang="en-US" smtClean="0"/>
+              <a:rPr lang="en-US"/>
               <a:t>Click to edit Master title style</a:t>
             </a:r>
-            <a:endParaRPr lang="en-US"/>
           </a:p>
         </p:txBody>
       </p:sp>
@@ -2150,38 +2149,37 @@
           <a:p>
             <a:pPr lvl="0"/>
             <a:r>
-              <a:rPr lang="en-US" smtClean="0"/>
+              <a:rPr lang="en-US"/>
               <a:t>Click to edit Master text styles</a:t>
             </a:r>
           </a:p>
           <a:p>
             <a:pPr lvl="1"/>
             <a:r>
-              <a:rPr lang="en-US" smtClean="0"/>
+              <a:rPr lang="en-US"/>
               <a:t>Second level</a:t>
             </a:r>
           </a:p>
           <a:p>
             <a:pPr lvl="2"/>
             <a:r>
-              <a:rPr lang="en-US" smtClean="0"/>
+              <a:rPr lang="en-US"/>
               <a:t>Third level</a:t>
             </a:r>
           </a:p>
           <a:p>
             <a:pPr lvl="3"/>
             <a:r>
-              <a:rPr lang="en-US" smtClean="0"/>
+              <a:rPr lang="en-US"/>
               <a:t>Fourth level</a:t>
             </a:r>
           </a:p>
           <a:p>
             <a:pPr lvl="4"/>
             <a:r>
-              <a:rPr lang="en-US" smtClean="0"/>
+              <a:rPr lang="en-US"/>
               <a:t>Fifth level</a:t>
             </a:r>
-            <a:endParaRPr lang="en-US"/>
           </a:p>
         </p:txBody>
       </p:sp>
@@ -2244,7 +2242,7 @@
           <a:p>
             <a:pPr lvl="0"/>
             <a:r>
-              <a:rPr lang="en-US" smtClean="0"/>
+              <a:rPr lang="en-US"/>
               <a:t>Click to edit Master text styles</a:t>
             </a:r>
           </a:p>
@@ -2267,7 +2265,7 @@
           <a:p>
             <a:fld id="{5BCAD085-E8A6-8845-BD4E-CB4CCA059FC4}" type="datetimeFigureOut">
               <a:rPr lang="en-US" smtClean="0"/>
-              <a:t>1/27/13</a:t>
+              <a:t>9/14/2026</a:t>
             </a:fld>
             <a:endParaRPr lang="en-US"/>
           </a:p>
@@ -2370,10 +2368,9 @@
           </a:lstStyle>
           <a:p>
             <a:r>
-              <a:rPr lang="en-US" smtClean="0"/>
+              <a:rPr lang="en-US"/>
               <a:t>Click to edit Master title style</a:t>
             </a:r>
-            <a:endParaRPr lang="en-US"/>
           </a:p>
         </p:txBody>
       </p:sp>
@@ -2497,7 +2494,7 @@
           <a:p>
             <a:pPr lvl="0"/>
             <a:r>
-              <a:rPr lang="en-US" smtClean="0"/>
+              <a:rPr lang="en-US"/>
               <a:t>Click to edit Master text styles</a:t>
             </a:r>
           </a:p>
@@ -2520,7 +2517,7 @@
           <a:p>
             <a:fld id="{5BCAD085-E8A6-8845-BD4E-CB4CCA059FC4}" type="datetimeFigureOut">
               <a:rPr lang="en-US" smtClean="0"/>
-              <a:t>1/27/13</a:t>
+              <a:t>9/14/2026</a:t>
             </a:fld>
             <a:endParaRPr lang="en-US"/>
           </a:p>
@@ -2629,10 +2626,9 @@
           <a:lstStyle/>
           <a:p>
             <a:r>
-              <a:rPr lang="en-US" smtClean="0"/>
+              <a:rPr lang="en-US"/>
               <a:t>Click to edit Master title style</a:t>
             </a:r>
-            <a:endParaRPr lang="en-US"/>
           </a:p>
         </p:txBody>
       </p:sp>
@@ -2663,38 +2659,37 @@
           <a:p>
             <a:pPr lvl="0"/>
             <a:r>
-              <a:rPr lang="en-US" smtClean="0"/>
+              <a:rPr lang="en-US"/>
               <a:t>Click to edit Master text styles</a:t>
             </a:r>
           </a:p>
           <a:p>
             <a:pPr lvl="1"/>
             <a:r>
-              <a:rPr lang="en-US" smtClean="0"/>
+              <a:rPr lang="en-US"/>
               <a:t>Second level</a:t>
             </a:r>
           </a:p>
           <a:p>
             <a:pPr lvl="2"/>
             <a:r>
-              <a:rPr lang="en-US" smtClean="0"/>
+              <a:rPr lang="en-US"/>
               <a:t>Third level</a:t>
             </a:r>
           </a:p>
           <a:p>
             <a:pPr lvl="3"/>
             <a:r>
-              <a:rPr lang="en-US" smtClean="0"/>
+              <a:rPr lang="en-US"/>
               <a:t>Fourth level</a:t>
             </a:r>
           </a:p>
           <a:p>
             <a:pPr lvl="4"/>
             <a:r>
-              <a:rPr lang="en-US" smtClean="0"/>
+              <a:rPr lang="en-US"/>
               <a:t>Fifth level</a:t>
             </a:r>
-            <a:endParaRPr lang="en-US"/>
           </a:p>
         </p:txBody>
       </p:sp>
@@ -2733,7 +2728,7 @@
           <a:p>
             <a:fld id="{5BCAD085-E8A6-8845-BD4E-CB4CCA059FC4}" type="datetimeFigureOut">
               <a:rPr lang="en-US" smtClean="0"/>
-              <a:t>1/27/13</a:t>
+              <a:t>9/14/2026</a:t>
             </a:fld>
             <a:endParaRPr lang="en-US"/>
           </a:p>
@@ -3092,7 +3087,7 @@
 </file>
 
 <file path=ppt/slides/slide1.xml><?xml version="1.0" encoding="utf-8"?>
-<p:sld xmlns:a="http://schemas.openxmlformats.org/drawingml/2006/main" xmlns:p="http://schemas.openxmlformats.org/presentationml/2006/main" xmlns:r="http://schemas.openxmlformats.org/officeDocument/2006/relationships">
+<p:sld xmlns:a="http://schemas.openxmlformats.org/drawingml/2006/main" xmlns:r="http://schemas.openxmlformats.org/officeDocument/2006/relationships" xmlns:p="http://schemas.openxmlformats.org/presentationml/2006/main">
   <p:cSld>
     <p:spTree>
       <p:nvGrpSpPr>
@@ -3100,7 +3095,14 @@
         <p:cNvGrpSpPr/>
         <p:nvPr/>
       </p:nvGrpSpPr>
-      <p:grpSpPr/>
+      <p:grpSpPr>
+        <a:xfrm>
+          <a:off x="0" y="0"/>
+          <a:ext cx="0" cy="0"/>
+          <a:chOff x="0" y="0"/>
+          <a:chExt cx="0" cy="0"/>
+        </a:xfrm>
+      </p:grpSpPr>
       <p:sp>
         <p:nvSpPr>
           <p:cNvPr id="2" name="Rectangle 1"/>
@@ -3143,6 +3145,7 @@
           <a:lstStyle/>
           <a:p>
             <a:pPr algn="ctr"/>
+            <a:endParaRPr/>
           </a:p>
         </p:txBody>
       </p:sp>
@@ -3154,8 +3157,8 @@
         </p:nvSpPr>
         <p:spPr>
           <a:xfrm>
-            <a:off x="914400" y="1005840"/>
-            <a:ext cx="4389120" cy="347472"/>
+            <a:off x="5067147" y="1479708"/>
+            <a:ext cx="2057400" cy="347472"/>
           </a:xfrm>
           <a:prstGeom prst="roundRect">
             <a:avLst/>
@@ -3196,7 +3199,8 @@
               </a:defRPr>
             </a:pPr>
             <a:r>
-              <a:t>THÈSE DE DOCTORAT — COMITÉ DE SUIVI (CSI 2026)</a:t>
+              <a:rPr dirty="0"/>
+              <a:t>COMITÉ DE SUIVI (CSI 2026)</a:t>
             </a:r>
           </a:p>
         </p:txBody>
@@ -3209,8 +3213,8 @@
         </p:nvSpPr>
         <p:spPr>
           <a:xfrm>
-            <a:off x="914400" y="1554480"/>
-            <a:ext cx="10332720" cy="2011680"/>
+            <a:off x="929640" y="2849689"/>
+            <a:ext cx="10332720" cy="984885"/>
           </a:xfrm>
           <a:prstGeom prst="rect">
             <a:avLst/>
@@ -3218,12 +3222,12 @@
           <a:noFill/>
         </p:spPr>
         <p:txBody>
-          <a:bodyPr wrap="square" lIns="0" rIns="0" tIns="0" bIns="0">
+          <a:bodyPr wrap="square" lIns="0" tIns="0" rIns="0" bIns="0">
             <a:spAutoFit/>
           </a:bodyPr>
           <a:lstStyle/>
           <a:p>
-            <a:pPr>
+            <a:pPr algn="ctr">
               <a:defRPr sz="2800" b="1">
                 <a:solidFill>
                   <a:srgbClr val="F8FAFC"/>
@@ -3232,8 +3236,57 @@
               </a:defRPr>
             </a:pPr>
             <a:r>
-              <a:t>Caractérisation, calibration et modélisation d'un interféromètre d'annulation photonique actif pour la détection directe d'exoplanètes</a:t>
-            </a:r>
+              <a:rPr lang="fr-FR" sz="3600" dirty="0"/>
+              <a:t>Active </a:t>
+            </a:r>
+            <a:r>
+              <a:rPr lang="fr-FR" sz="3600" dirty="0" err="1"/>
+              <a:t>Tunable</a:t>
+            </a:r>
+            <a:r>
+              <a:rPr lang="fr-FR" sz="3600" dirty="0"/>
+              <a:t> Kernel </a:t>
+            </a:r>
+            <a:r>
+              <a:rPr lang="fr-FR" sz="3600" dirty="0" err="1"/>
+              <a:t>Nulling</a:t>
+            </a:r>
+            <a:endParaRPr lang="fr-FR" sz="3600" dirty="0"/>
+          </a:p>
+          <a:p>
+            <a:pPr algn="ctr">
+              <a:defRPr sz="2800" b="1">
+                <a:solidFill>
+                  <a:srgbClr val="F8FAFC"/>
+                </a:solidFill>
+                <a:latin typeface="Segoe UI"/>
+              </a:defRPr>
+            </a:pPr>
+            <a:r>
+              <a:rPr lang="fr-FR" sz="2800" dirty="0"/>
+              <a:t>for Direct </a:t>
+            </a:r>
+            <a:r>
+              <a:rPr lang="fr-FR" sz="2800" dirty="0" err="1"/>
+              <a:t>Detection</a:t>
+            </a:r>
+            <a:r>
+              <a:rPr lang="fr-FR" sz="2800" dirty="0"/>
+              <a:t> of </a:t>
+            </a:r>
+            <a:r>
+              <a:rPr lang="fr-FR" sz="2800" dirty="0" err="1"/>
+              <a:t>Extrasolar</a:t>
+            </a:r>
+            <a:r>
+              <a:rPr lang="fr-FR" sz="2800" dirty="0"/>
+              <a:t> </a:t>
+            </a:r>
+            <a:r>
+              <a:rPr lang="fr-FR" sz="2800" dirty="0" err="1"/>
+              <a:t>Planets</a:t>
+            </a:r>
+            <a:endParaRPr sz="2800" dirty="0"/>
           </a:p>
         </p:txBody>
       </p:sp>
@@ -3245,7 +3298,7 @@
         </p:nvSpPr>
         <p:spPr>
           <a:xfrm>
-            <a:off x="914400" y="3749039"/>
+            <a:off x="320040" y="5330951"/>
             <a:ext cx="7315200" cy="457200"/>
           </a:xfrm>
           <a:prstGeom prst="rect">
@@ -3254,7 +3307,7 @@
           <a:noFill/>
         </p:spPr>
         <p:txBody>
-          <a:bodyPr wrap="none" lIns="0" rIns="0" tIns="0" bIns="0">
+          <a:bodyPr wrap="none" lIns="0" tIns="0" rIns="0" bIns="0">
             <a:spAutoFit/>
           </a:bodyPr>
           <a:lstStyle/>
@@ -3281,7 +3334,7 @@
         </p:nvSpPr>
         <p:spPr>
           <a:xfrm>
-            <a:off x="914400" y="4297680"/>
+            <a:off x="320040" y="5879592"/>
             <a:ext cx="10058400" cy="914400"/>
           </a:xfrm>
           <a:prstGeom prst="rect">
@@ -3290,7 +3343,7 @@
           <a:noFill/>
         </p:spPr>
         <p:txBody>
-          <a:bodyPr wrap="square" lIns="0" rIns="0" tIns="0" bIns="0">
+          <a:bodyPr wrap="square" lIns="0" tIns="0" rIns="0" bIns="0">
             <a:spAutoFit/>
           </a:bodyPr>
           <a:lstStyle/>
@@ -3307,7 +3360,24 @@
               </a:defRPr>
             </a:pPr>
             <a:r>
-              <a:t>Direction : Frantz Martinache &amp; David Mary (Laboratoire Lagrange, OCA, CNRS, UCA)</a:t>
+              <a:rPr dirty="0"/>
+              <a:t>Direction : Frantz </a:t>
+            </a:r>
+            <a:r>
+              <a:rPr dirty="0" err="1"/>
+              <a:t>Martinache</a:t>
+            </a:r>
+            <a:r>
+              <a:rPr dirty="0"/>
+              <a:t> &amp; David Mary (</a:t>
+            </a:r>
+            <a:r>
+              <a:rPr dirty="0" err="1"/>
+              <a:t>Laboratoire</a:t>
+            </a:r>
+            <a:r>
+              <a:rPr dirty="0"/>
+              <a:t> Lagrange, OCA, CNRS, UCA)</a:t>
             </a:r>
           </a:p>
           <a:p>
@@ -3323,7 +3393,16 @@
               </a:defRPr>
             </a:pPr>
             <a:r>
-              <a:t>Collaborations : Marc-Antoine Martinod, Nick Cvetojevic, Roxanne Ligi, Sylvie Robbe-Dubois</a:t>
+              <a:rPr dirty="0"/>
+              <a:t>Collaborations : Marc-Antoine Martinod, Nick </a:t>
+            </a:r>
+            <a:r>
+              <a:rPr dirty="0" err="1"/>
+              <a:t>Cvetojevic</a:t>
+            </a:r>
+            <a:r>
+              <a:rPr dirty="0"/>
+              <a:t>, Roxanne Ligi, Sylvie Robbe-Dubois</a:t>
             </a:r>
           </a:p>
           <a:p>
@@ -3336,35 +3415,24 @@
               </a:defRPr>
             </a:pPr>
             <a:r>
-              <a:t>Membres du Comité : Sylvie Robbe-Dubois &amp; Jean-Marc Petit</a:t>
-            </a:r>
-          </a:p>
-        </p:txBody>
-      </p:sp>
-      <p:pic>
-        <p:nvPicPr>
-          <p:cNvPr id="7" name="Picture 6" descr="image1.png"/>
-          <p:cNvPicPr>
-            <a:picLocks noChangeAspect="1"/>
-          </p:cNvPicPr>
-          <p:nvPr/>
-        </p:nvPicPr>
-        <p:blipFill>
-          <a:blip r:embed="rId2"/>
-          <a:stretch>
-            <a:fillRect/>
-          </a:stretch>
-        </p:blipFill>
-        <p:spPr>
-          <a:xfrm>
-            <a:off x="914400" y="5486400"/>
-            <a:ext cx="5669280" cy="1445467"/>
-          </a:xfrm>
-          <a:prstGeom prst="rect">
-            <a:avLst/>
-          </a:prstGeom>
-        </p:spPr>
-      </p:pic>
+              <a:rPr dirty="0" err="1"/>
+              <a:t>Membres</a:t>
+            </a:r>
+            <a:r>
+              <a:rPr dirty="0"/>
+              <a:t> du </a:t>
+            </a:r>
+            <a:r>
+              <a:rPr dirty="0" err="1"/>
+              <a:t>Comité</a:t>
+            </a:r>
+            <a:r>
+              <a:rPr dirty="0"/>
+              <a:t> : Sylvie Robbe-Dubois &amp; Jean-Marc Petit</a:t>
+            </a:r>
+          </a:p>
+        </p:txBody>
+      </p:sp>
     </p:spTree>
   </p:cSld>
   <p:clrMapOvr>
@@ -3374,7 +3442,7 @@
 </file>
 
 <file path=ppt/slides/slide10.xml><?xml version="1.0" encoding="utf-8"?>
-<p:sld xmlns:a="http://schemas.openxmlformats.org/drawingml/2006/main" xmlns:p="http://schemas.openxmlformats.org/presentationml/2006/main" xmlns:r="http://schemas.openxmlformats.org/officeDocument/2006/relationships">
+<p:sld xmlns:a="http://schemas.openxmlformats.org/drawingml/2006/main" xmlns:r="http://schemas.openxmlformats.org/officeDocument/2006/relationships" xmlns:p="http://schemas.openxmlformats.org/presentationml/2006/main">
   <p:cSld>
     <p:spTree>
       <p:nvGrpSpPr>
@@ -3382,7 +3450,14 @@
         <p:cNvGrpSpPr/>
         <p:nvPr/>
       </p:nvGrpSpPr>
-      <p:grpSpPr/>
+      <p:grpSpPr>
+        <a:xfrm>
+          <a:off x="0" y="0"/>
+          <a:ext cx="0" cy="0"/>
+          <a:chOff x="0" y="0"/>
+          <a:chExt cx="0" cy="0"/>
+        </a:xfrm>
+      </p:grpSpPr>
       <p:sp>
         <p:nvSpPr>
           <p:cNvPr id="2" name="Rounded Rectangle 1"/>
@@ -3421,7 +3496,7 @@
           </a:fontRef>
         </p:style>
         <p:txBody>
-          <a:bodyPr rtlCol="0" anchor="ctr" wrap="square" lIns="0" rIns="0" tIns="0" bIns="0"/>
+          <a:bodyPr wrap="square" lIns="0" tIns="0" rIns="0" bIns="0" rtlCol="0" anchor="ctr"/>
           <a:lstStyle/>
           <a:p>
             <a:pPr algn="ctr">
@@ -3455,7 +3530,7 @@
           <a:noFill/>
         </p:spPr>
         <p:txBody>
-          <a:bodyPr wrap="square" lIns="0" rIns="0" tIns="0" bIns="0">
+          <a:bodyPr wrap="square" lIns="0" tIns="0" rIns="0" bIns="0">
             <a:spAutoFit/>
           </a:bodyPr>
           <a:lstStyle/>
@@ -3491,7 +3566,7 @@
           <a:noFill/>
         </p:spPr>
         <p:txBody>
-          <a:bodyPr wrap="none" lIns="0" rIns="0" tIns="0" bIns="0">
+          <a:bodyPr wrap="none" lIns="0" tIns="0" rIns="0" bIns="0">
             <a:spAutoFit/>
           </a:bodyPr>
           <a:lstStyle/>
@@ -3527,7 +3602,7 @@
           <a:noFill/>
         </p:spPr>
         <p:txBody>
-          <a:bodyPr wrap="none" lIns="0" rIns="0" tIns="0" bIns="0">
+          <a:bodyPr wrap="none" lIns="0" tIns="0" rIns="0" bIns="0">
             <a:spAutoFit/>
           </a:bodyPr>
           <a:lstStyle/>
@@ -3584,7 +3659,7 @@
           </a:fontRef>
         </p:style>
         <p:txBody>
-          <a:bodyPr rtlCol="0" anchor="ctr" wrap="square" lIns="228600" tIns="228600" rIns="228600" bIns="228600"/>
+          <a:bodyPr wrap="square" lIns="228600" tIns="228600" rIns="228600" bIns="228600" rtlCol="0" anchor="ctr"/>
           <a:lstStyle/>
           <a:p>
             <a:pPr algn="ctr">
@@ -3593,7 +3668,7 @@
               </a:spcAft>
             </a:pPr>
             <a:r>
-              <a:rPr b="1" sz="1450">
+              <a:rPr sz="1450" b="1">
                 <a:solidFill>
                   <a:srgbClr val="0F172A"/>
                 </a:solidFill>
@@ -3602,7 +3677,7 @@
               <a:t>Limite douce détecteur : </a:t>
             </a:r>
             <a:r>
-              <a:rPr b="0" sz="1400">
+              <a:rPr sz="1400" b="0">
                 <a:solidFill>
                   <a:srgbClr val="475569"/>
                 </a:solidFill>
@@ -3618,7 +3693,7 @@
               </a:spcAft>
             </a:pPr>
             <a:r>
-              <a:rPr b="1" sz="1450">
+              <a:rPr sz="1450" b="1">
                 <a:solidFill>
                   <a:srgbClr val="0F172A"/>
                 </a:solidFill>
@@ -3627,7 +3702,7 @@
               <a:t>Limite dure cross-talk : </a:t>
             </a:r>
             <a:r>
-              <a:rPr b="0" sz="1400">
+              <a:rPr sz="1400" b="0">
                 <a:solidFill>
                   <a:srgbClr val="475569"/>
                 </a:solidFill>
@@ -3643,7 +3718,7 @@
               </a:spcAft>
             </a:pPr>
             <a:r>
-              <a:rPr b="1" sz="1450">
+              <a:rPr sz="1450" b="1">
                 <a:solidFill>
                   <a:srgbClr val="0F172A"/>
                 </a:solidFill>
@@ -3652,7 +3727,7 @@
               <a:t>Stabilité temporelle : </a:t>
             </a:r>
             <a:r>
-              <a:rPr b="0" sz="1400">
+              <a:rPr sz="1400" b="0">
                 <a:solidFill>
                   <a:srgbClr val="475569"/>
                 </a:solidFill>
@@ -3668,7 +3743,7 @@
               </a:spcAft>
             </a:pPr>
             <a:r>
-              <a:rPr b="1" sz="1450">
+              <a:rPr sz="1450" b="1">
                 <a:solidFill>
                   <a:srgbClr val="0F172A"/>
                 </a:solidFill>
@@ -3677,7 +3752,7 @@
               <a:t>Limitation de Hooke &amp; Jeeves : </a:t>
             </a:r>
             <a:r>
-              <a:rPr b="0" sz="1400">
+              <a:rPr sz="1400" b="0">
                 <a:solidFill>
                   <a:srgbClr val="475569"/>
                 </a:solidFill>
@@ -3693,7 +3768,7 @@
               </a:spcAft>
             </a:pPr>
             <a:r>
-              <a:rPr b="1" sz="1450">
+              <a:rPr sz="1450" b="1">
                 <a:solidFill>
                   <a:srgbClr val="0F172A"/>
                 </a:solidFill>
@@ -3702,7 +3777,7 @@
               <a:t>Plot de Nick Cvetojevic : </a:t>
             </a:r>
             <a:r>
-              <a:rPr b="0" sz="1400">
+              <a:rPr sz="1400" b="0">
                 <a:solidFill>
                   <a:srgbClr val="475569"/>
                 </a:solidFill>
@@ -3755,6 +3830,7 @@
           <a:lstStyle/>
           <a:p>
             <a:pPr algn="ctr"/>
+            <a:endParaRPr/>
           </a:p>
         </p:txBody>
       </p:sp>
@@ -3799,7 +3875,7 @@
           <a:noFill/>
         </p:spPr>
         <p:txBody>
-          <a:bodyPr wrap="square" lIns="0" rIns="0" tIns="0" bIns="0">
+          <a:bodyPr wrap="square" lIns="0" tIns="0" rIns="0" bIns="0">
             <a:spAutoFit/>
           </a:bodyPr>
           <a:lstStyle/>
@@ -3856,7 +3932,7 @@
           </a:fontRef>
         </p:style>
         <p:txBody>
-          <a:bodyPr rtlCol="0" anchor="ctr" wrap="square" lIns="182880" tIns="109728" rIns="182880" bIns="91440"/>
+          <a:bodyPr wrap="square" lIns="182880" tIns="109728" rIns="182880" bIns="91440" rtlCol="0" anchor="ctr"/>
           <a:lstStyle/>
           <a:p>
             <a:pPr algn="ctr">
@@ -3891,7 +3967,7 @@
 </file>
 
 <file path=ppt/slides/slide11.xml><?xml version="1.0" encoding="utf-8"?>
-<p:sld xmlns:a="http://schemas.openxmlformats.org/drawingml/2006/main" xmlns:p="http://schemas.openxmlformats.org/presentationml/2006/main" xmlns:r="http://schemas.openxmlformats.org/officeDocument/2006/relationships">
+<p:sld xmlns:a="http://schemas.openxmlformats.org/drawingml/2006/main" xmlns:r="http://schemas.openxmlformats.org/officeDocument/2006/relationships" xmlns:p="http://schemas.openxmlformats.org/presentationml/2006/main">
   <p:cSld>
     <p:spTree>
       <p:nvGrpSpPr>
@@ -3899,7 +3975,14 @@
         <p:cNvGrpSpPr/>
         <p:nvPr/>
       </p:nvGrpSpPr>
-      <p:grpSpPr/>
+      <p:grpSpPr>
+        <a:xfrm>
+          <a:off x="0" y="0"/>
+          <a:ext cx="0" cy="0"/>
+          <a:chOff x="0" y="0"/>
+          <a:chExt cx="0" cy="0"/>
+        </a:xfrm>
+      </p:grpSpPr>
       <p:sp>
         <p:nvSpPr>
           <p:cNvPr id="2" name="Rounded Rectangle 1"/>
@@ -3938,7 +4021,7 @@
           </a:fontRef>
         </p:style>
         <p:txBody>
-          <a:bodyPr rtlCol="0" anchor="ctr" wrap="square" lIns="0" rIns="0" tIns="0" bIns="0"/>
+          <a:bodyPr wrap="square" lIns="0" tIns="0" rIns="0" bIns="0" rtlCol="0" anchor="ctr"/>
           <a:lstStyle/>
           <a:p>
             <a:pPr algn="ctr">
@@ -3972,7 +4055,7 @@
           <a:noFill/>
         </p:spPr>
         <p:txBody>
-          <a:bodyPr wrap="square" lIns="0" rIns="0" tIns="0" bIns="0">
+          <a:bodyPr wrap="square" lIns="0" tIns="0" rIns="0" bIns="0">
             <a:spAutoFit/>
           </a:bodyPr>
           <a:lstStyle/>
@@ -4008,7 +4091,7 @@
           <a:noFill/>
         </p:spPr>
         <p:txBody>
-          <a:bodyPr wrap="none" lIns="0" rIns="0" tIns="0" bIns="0">
+          <a:bodyPr wrap="none" lIns="0" tIns="0" rIns="0" bIns="0">
             <a:spAutoFit/>
           </a:bodyPr>
           <a:lstStyle/>
@@ -4044,7 +4127,7 @@
           <a:noFill/>
         </p:spPr>
         <p:txBody>
-          <a:bodyPr wrap="none" lIns="0" rIns="0" tIns="0" bIns="0">
+          <a:bodyPr wrap="none" lIns="0" tIns="0" rIns="0" bIns="0">
             <a:spAutoFit/>
           </a:bodyPr>
           <a:lstStyle/>
@@ -4101,7 +4184,7 @@
           </a:fontRef>
         </p:style>
         <p:txBody>
-          <a:bodyPr rtlCol="0" anchor="ctr" wrap="square" lIns="228600" tIns="228600" rIns="228600" bIns="228600"/>
+          <a:bodyPr wrap="square" lIns="228600" tIns="228600" rIns="228600" bIns="228600" rtlCol="0" anchor="ctr"/>
           <a:lstStyle/>
           <a:p>
             <a:pPr algn="ctr">
@@ -4110,7 +4193,7 @@
               </a:spcAft>
             </a:pPr>
             <a:r>
-              <a:rPr b="1" sz="1450">
+              <a:rPr sz="1450" b="1">
                 <a:solidFill>
                   <a:srgbClr val="0F172A"/>
                 </a:solidFill>
@@ -4119,7 +4202,7 @@
               <a:t>Conférences internationales : </a:t>
             </a:r>
             <a:r>
-              <a:rPr b="0" sz="1400">
+              <a:rPr sz="1400" b="0">
                 <a:solidFill>
                   <a:srgbClr val="475569"/>
                 </a:solidFill>
@@ -4135,7 +4218,7 @@
               </a:spcAft>
             </a:pPr>
             <a:r>
-              <a:rPr b="1" sz="1250">
+              <a:rPr sz="1250" b="1">
                 <a:solidFill>
                   <a:srgbClr val="475569"/>
                 </a:solidFill>
@@ -4144,7 +4227,7 @@
               <a:t>• Workshop WITSO (ESA) : </a:t>
             </a:r>
             <a:r>
-              <a:rPr b="0" sz="1200">
+              <a:rPr sz="1200" b="0">
                 <a:solidFill>
                   <a:srgbClr val="94A3B8"/>
                 </a:solidFill>
@@ -4160,7 +4243,7 @@
               </a:spcAft>
             </a:pPr>
             <a:r>
-              <a:rPr b="1" sz="1250">
+              <a:rPr sz="1250" b="1">
                 <a:solidFill>
                   <a:srgbClr val="475569"/>
                 </a:solidFill>
@@ -4169,7 +4252,7 @@
               <a:t>• Conférence LIFE : </a:t>
             </a:r>
             <a:r>
-              <a:rPr b="0" sz="1200">
+              <a:rPr sz="1200" b="0">
                 <a:solidFill>
                   <a:srgbClr val="94A3B8"/>
                 </a:solidFill>
@@ -4185,7 +4268,7 @@
               </a:spcAft>
             </a:pPr>
             <a:r>
-              <a:rPr b="1" sz="1450">
+              <a:rPr sz="1450" b="1">
                 <a:solidFill>
                   <a:srgbClr val="0F172A"/>
                 </a:solidFill>
@@ -4194,7 +4277,7 @@
               <a:t>Aléa médical : </a:t>
             </a:r>
             <a:r>
-              <a:rPr b="0" sz="1400">
+              <a:rPr sz="1400" b="0">
                 <a:solidFill>
                   <a:srgbClr val="475569"/>
                 </a:solidFill>
@@ -4210,7 +4293,7 @@
               </a:spcAft>
             </a:pPr>
             <a:r>
-              <a:rPr b="1" sz="1450">
+              <a:rPr sz="1450" b="1">
                 <a:solidFill>
                   <a:srgbClr val="0F172A"/>
                 </a:solidFill>
@@ -4219,7 +4302,7 @@
               <a:t>Formations doctorales : </a:t>
             </a:r>
             <a:r>
-              <a:rPr b="0" sz="1400">
+              <a:rPr sz="1400" b="0">
                 <a:solidFill>
                   <a:srgbClr val="475569"/>
                 </a:solidFill>
@@ -4268,14 +4351,14 @@
           </a:fontRef>
         </p:style>
         <p:txBody>
-          <a:bodyPr rtlCol="0" anchor="ctr" wrap="square" lIns="274320" rIns="274320" tIns="274320" bIns="274320"/>
+          <a:bodyPr wrap="square" lIns="274320" tIns="274320" rIns="274320" bIns="274320" rtlCol="0" anchor="ctr"/>
           <a:lstStyle/>
           <a:p>
             <a:pPr algn="ctr">
               <a:spcAft>
                 <a:spcPts val="1400"/>
               </a:spcAft>
-              <a:defRPr b="1" sz="1500">
+              <a:defRPr sz="1500" b="1">
                 <a:solidFill>
                   <a:srgbClr val="1E40AF"/>
                 </a:solidFill>
@@ -4293,7 +4376,7 @@
               </a:spcAft>
             </a:pPr>
             <a:r>
-              <a:rPr b="1" sz="1200">
+              <a:rPr sz="1200" b="1">
                 <a:solidFill>
                   <a:srgbClr val="0F172A"/>
                 </a:solidFill>
@@ -4318,7 +4401,7 @@
               </a:spcAft>
             </a:pPr>
             <a:r>
-              <a:rPr b="1" sz="1200">
+              <a:rPr sz="1200" b="1">
                 <a:solidFill>
                   <a:srgbClr val="0F172A"/>
                 </a:solidFill>
@@ -4343,7 +4426,7 @@
               </a:spcAft>
             </a:pPr>
             <a:r>
-              <a:rPr b="1" sz="1200">
+              <a:rPr sz="1200" b="1">
                 <a:solidFill>
                   <a:srgbClr val="0F172A"/>
                 </a:solidFill>
@@ -4368,7 +4451,7 @@
               </a:spcAft>
             </a:pPr>
             <a:r>
-              <a:rPr b="1" sz="1200">
+              <a:rPr sz="1200" b="1">
                 <a:solidFill>
                   <a:srgbClr val="0F172A"/>
                 </a:solidFill>
@@ -4393,7 +4476,7 @@
               </a:spcAft>
             </a:pPr>
             <a:r>
-              <a:rPr b="1" sz="1200">
+              <a:rPr sz="1200" b="1">
                 <a:solidFill>
                   <a:srgbClr val="0F172A"/>
                 </a:solidFill>
@@ -4451,7 +4534,7 @@
           </a:fontRef>
         </p:style>
         <p:txBody>
-          <a:bodyPr rtlCol="0" anchor="ctr" wrap="square" lIns="182880" tIns="109728" rIns="182880" bIns="91440"/>
+          <a:bodyPr wrap="square" lIns="182880" tIns="109728" rIns="182880" bIns="91440" rtlCol="0" anchor="ctr"/>
           <a:lstStyle/>
           <a:p>
             <a:pPr algn="ctr">
@@ -4486,7 +4569,7 @@
 </file>
 
 <file path=ppt/slides/slide12.xml><?xml version="1.0" encoding="utf-8"?>
-<p:sld xmlns:a="http://schemas.openxmlformats.org/drawingml/2006/main" xmlns:p="http://schemas.openxmlformats.org/presentationml/2006/main" xmlns:r="http://schemas.openxmlformats.org/officeDocument/2006/relationships">
+<p:sld xmlns:a="http://schemas.openxmlformats.org/drawingml/2006/main" xmlns:r="http://schemas.openxmlformats.org/officeDocument/2006/relationships" xmlns:p="http://schemas.openxmlformats.org/presentationml/2006/main">
   <p:cSld>
     <p:spTree>
       <p:nvGrpSpPr>
@@ -4494,7 +4577,14 @@
         <p:cNvGrpSpPr/>
         <p:nvPr/>
       </p:nvGrpSpPr>
-      <p:grpSpPr/>
+      <p:grpSpPr>
+        <a:xfrm>
+          <a:off x="0" y="0"/>
+          <a:ext cx="0" cy="0"/>
+          <a:chOff x="0" y="0"/>
+          <a:chExt cx="0" cy="0"/>
+        </a:xfrm>
+      </p:grpSpPr>
       <p:sp>
         <p:nvSpPr>
           <p:cNvPr id="2" name="Rounded Rectangle 1"/>
@@ -4533,7 +4623,7 @@
           </a:fontRef>
         </p:style>
         <p:txBody>
-          <a:bodyPr rtlCol="0" anchor="ctr" wrap="square" lIns="0" rIns="0" tIns="0" bIns="0"/>
+          <a:bodyPr wrap="square" lIns="0" tIns="0" rIns="0" bIns="0" rtlCol="0" anchor="ctr"/>
           <a:lstStyle/>
           <a:p>
             <a:pPr algn="ctr">
@@ -4567,7 +4657,7 @@
           <a:noFill/>
         </p:spPr>
         <p:txBody>
-          <a:bodyPr wrap="square" lIns="0" rIns="0" tIns="0" bIns="0">
+          <a:bodyPr wrap="square" lIns="0" tIns="0" rIns="0" bIns="0">
             <a:spAutoFit/>
           </a:bodyPr>
           <a:lstStyle/>
@@ -4603,7 +4693,7 @@
           <a:noFill/>
         </p:spPr>
         <p:txBody>
-          <a:bodyPr wrap="none" lIns="0" rIns="0" tIns="0" bIns="0">
+          <a:bodyPr wrap="none" lIns="0" tIns="0" rIns="0" bIns="0">
             <a:spAutoFit/>
           </a:bodyPr>
           <a:lstStyle/>
@@ -4639,7 +4729,7 @@
           <a:noFill/>
         </p:spPr>
         <p:txBody>
-          <a:bodyPr wrap="none" lIns="0" rIns="0" tIns="0" bIns="0">
+          <a:bodyPr wrap="none" lIns="0" tIns="0" rIns="0" bIns="0">
             <a:spAutoFit/>
           </a:bodyPr>
           <a:lstStyle/>
@@ -4696,7 +4786,7 @@
           </a:fontRef>
         </p:style>
         <p:txBody>
-          <a:bodyPr rtlCol="0" anchor="ctr" wrap="square" lIns="228600" tIns="228600" rIns="228600" bIns="228600"/>
+          <a:bodyPr wrap="square" lIns="228600" tIns="228600" rIns="228600" bIns="228600" rtlCol="0" anchor="ctr"/>
           <a:lstStyle/>
           <a:p>
             <a:pPr algn="ctr">
@@ -4705,7 +4795,7 @@
               </a:spcAft>
             </a:pPr>
             <a:r>
-              <a:rPr b="1" sz="1450">
+              <a:rPr sz="1450" b="1">
                 <a:solidFill>
                   <a:srgbClr val="0F172A"/>
                 </a:solidFill>
@@ -4714,7 +4804,7 @@
               <a:t>Article A&amp;A en cours : </a:t>
             </a:r>
             <a:r>
-              <a:rPr b="0" sz="1400">
+              <a:rPr sz="1400" b="0">
                 <a:solidFill>
                   <a:srgbClr val="475569"/>
                 </a:solidFill>
@@ -4730,7 +4820,7 @@
               </a:spcAft>
             </a:pPr>
             <a:r>
-              <a:rPr b="1" sz="1450">
+              <a:rPr sz="1450" b="1">
                 <a:solidFill>
                   <a:srgbClr val="0F172A"/>
                 </a:solidFill>
@@ -4739,7 +4829,7 @@
               <a:t>État du manuscrit : </a:t>
             </a:r>
             <a:r>
-              <a:rPr b="0" sz="1400">
+              <a:rPr sz="1400" b="0">
                 <a:solidFill>
                   <a:srgbClr val="475569"/>
                 </a:solidFill>
@@ -4755,7 +4845,7 @@
               </a:spcAft>
             </a:pPr>
             <a:r>
-              <a:rPr b="1" sz="1450">
+              <a:rPr sz="1450" b="1">
                 <a:solidFill>
                   <a:srgbClr val="0F172A"/>
                 </a:solidFill>
@@ -4764,7 +4854,7 @@
               <a:t>Diagnostic TDAH récent : </a:t>
             </a:r>
             <a:r>
-              <a:rPr b="0" sz="1400">
+              <a:rPr sz="1400" b="0">
                 <a:solidFill>
                   <a:srgbClr val="475569"/>
                 </a:solidFill>
@@ -4780,7 +4870,7 @@
               </a:spcAft>
             </a:pPr>
             <a:r>
-              <a:rPr b="1" sz="1450">
+              <a:rPr sz="1450" b="1">
                 <a:solidFill>
                   <a:srgbClr val="0F172A"/>
                 </a:solidFill>
@@ -4789,7 +4879,7 @@
               <a:t>Prise en charge médicale : </a:t>
             </a:r>
             <a:r>
-              <a:rPr b="0" sz="1400">
+              <a:rPr sz="1400" b="0">
                 <a:solidFill>
                   <a:srgbClr val="475569"/>
                 </a:solidFill>
@@ -4805,7 +4895,7 @@
               </a:spcAft>
             </a:pPr>
             <a:r>
-              <a:rPr b="1" sz="1450">
+              <a:rPr sz="1450" b="1">
                 <a:solidFill>
                   <a:srgbClr val="0F172A"/>
                 </a:solidFill>
@@ -4814,7 +4904,7 @@
               <a:t>Perspective positive : </a:t>
             </a:r>
             <a:r>
-              <a:rPr b="0" sz="1400">
+              <a:rPr sz="1400" b="0">
                 <a:solidFill>
                   <a:srgbClr val="475569"/>
                 </a:solidFill>
@@ -4867,6 +4957,7 @@
           <a:lstStyle/>
           <a:p>
             <a:pPr algn="ctr"/>
+            <a:endParaRPr/>
           </a:p>
         </p:txBody>
       </p:sp>
@@ -4911,7 +5002,7 @@
           <a:noFill/>
         </p:spPr>
         <p:txBody>
-          <a:bodyPr wrap="square" lIns="0" rIns="0" tIns="0" bIns="0">
+          <a:bodyPr wrap="square" lIns="0" tIns="0" rIns="0" bIns="0">
             <a:spAutoFit/>
           </a:bodyPr>
           <a:lstStyle/>
@@ -4968,7 +5059,7 @@
           </a:fontRef>
         </p:style>
         <p:txBody>
-          <a:bodyPr rtlCol="0" anchor="ctr" wrap="square" lIns="182880" tIns="109728" rIns="182880" bIns="91440"/>
+          <a:bodyPr wrap="square" lIns="182880" tIns="109728" rIns="182880" bIns="91440" rtlCol="0" anchor="ctr"/>
           <a:lstStyle/>
           <a:p>
             <a:pPr algn="ctr">
@@ -5003,7 +5094,7 @@
 </file>
 
 <file path=ppt/slides/slide13.xml><?xml version="1.0" encoding="utf-8"?>
-<p:sld xmlns:a="http://schemas.openxmlformats.org/drawingml/2006/main" xmlns:p="http://schemas.openxmlformats.org/presentationml/2006/main" xmlns:r="http://schemas.openxmlformats.org/officeDocument/2006/relationships">
+<p:sld xmlns:a="http://schemas.openxmlformats.org/drawingml/2006/main" xmlns:r="http://schemas.openxmlformats.org/officeDocument/2006/relationships" xmlns:p="http://schemas.openxmlformats.org/presentationml/2006/main">
   <p:cSld>
     <p:spTree>
       <p:nvGrpSpPr>
@@ -5011,7 +5102,14 @@
         <p:cNvGrpSpPr/>
         <p:nvPr/>
       </p:nvGrpSpPr>
-      <p:grpSpPr/>
+      <p:grpSpPr>
+        <a:xfrm>
+          <a:off x="0" y="0"/>
+          <a:ext cx="0" cy="0"/>
+          <a:chOff x="0" y="0"/>
+          <a:chExt cx="0" cy="0"/>
+        </a:xfrm>
+      </p:grpSpPr>
       <p:sp>
         <p:nvSpPr>
           <p:cNvPr id="2" name="Rounded Rectangle 1"/>
@@ -5050,7 +5148,7 @@
           </a:fontRef>
         </p:style>
         <p:txBody>
-          <a:bodyPr rtlCol="0" anchor="ctr" wrap="square" lIns="0" rIns="0" tIns="0" bIns="0"/>
+          <a:bodyPr wrap="square" lIns="0" tIns="0" rIns="0" bIns="0" rtlCol="0" anchor="ctr"/>
           <a:lstStyle/>
           <a:p>
             <a:pPr algn="ctr">
@@ -5084,7 +5182,7 @@
           <a:noFill/>
         </p:spPr>
         <p:txBody>
-          <a:bodyPr wrap="square" lIns="0" rIns="0" tIns="0" bIns="0">
+          <a:bodyPr wrap="square" lIns="0" tIns="0" rIns="0" bIns="0">
             <a:spAutoFit/>
           </a:bodyPr>
           <a:lstStyle/>
@@ -5120,7 +5218,7 @@
           <a:noFill/>
         </p:spPr>
         <p:txBody>
-          <a:bodyPr wrap="none" lIns="0" rIns="0" tIns="0" bIns="0">
+          <a:bodyPr wrap="none" lIns="0" tIns="0" rIns="0" bIns="0">
             <a:spAutoFit/>
           </a:bodyPr>
           <a:lstStyle/>
@@ -5156,7 +5254,7 @@
           <a:noFill/>
         </p:spPr>
         <p:txBody>
-          <a:bodyPr wrap="none" lIns="0" rIns="0" tIns="0" bIns="0">
+          <a:bodyPr wrap="none" lIns="0" tIns="0" rIns="0" bIns="0">
             <a:spAutoFit/>
           </a:bodyPr>
           <a:lstStyle/>
@@ -5213,7 +5311,7 @@
           </a:fontRef>
         </p:style>
         <p:txBody>
-          <a:bodyPr rtlCol="0" anchor="ctr" wrap="square" lIns="228600" tIns="228600" rIns="228600" bIns="228600"/>
+          <a:bodyPr wrap="square" lIns="228600" tIns="228600" rIns="228600" bIns="228600" rtlCol="0" anchor="ctr"/>
           <a:lstStyle/>
           <a:p>
             <a:pPr algn="ctr">
@@ -5222,7 +5320,7 @@
               </a:spcAft>
             </a:pPr>
             <a:r>
-              <a:rPr b="1" sz="1450">
+              <a:rPr sz="1450" b="1">
                 <a:solidFill>
                   <a:srgbClr val="0F172A"/>
                 </a:solidFill>
@@ -5231,7 +5329,7 @@
               <a:t>Extension Kernel-Null : </a:t>
             </a:r>
             <a:r>
-              <a:rPr b="0" sz="1400">
+              <a:rPr sz="1400" b="0">
                 <a:solidFill>
                   <a:srgbClr val="475569"/>
                 </a:solidFill>
@@ -5247,7 +5345,7 @@
               </a:spcAft>
             </a:pPr>
             <a:r>
-              <a:rPr b="1" sz="1450">
+              <a:rPr sz="1450" b="1">
                 <a:solidFill>
                   <a:srgbClr val="0F172A"/>
                 </a:solidFill>
@@ -5256,7 +5354,7 @@
               <a:t>Passerelle PHOBos ↔ PHISE : </a:t>
             </a:r>
             <a:r>
-              <a:rPr b="0" sz="1400">
+              <a:rPr sz="1400" b="0">
                 <a:solidFill>
                   <a:srgbClr val="475569"/>
                 </a:solidFill>
@@ -5272,7 +5370,7 @@
               </a:spcAft>
             </a:pPr>
             <a:r>
-              <a:rPr b="1" sz="1450">
+              <a:rPr sz="1450" b="1">
                 <a:solidFill>
                   <a:srgbClr val="0F172A"/>
                 </a:solidFill>
@@ -5281,7 +5379,7 @@
               <a:t>Documentation &amp; Packaging : </a:t>
             </a:r>
             <a:r>
-              <a:rPr b="0" sz="1400">
+              <a:rPr sz="1400" b="0">
                 <a:solidFill>
                   <a:srgbClr val="475569"/>
                 </a:solidFill>
@@ -5297,7 +5395,7 @@
               </a:spcAft>
             </a:pPr>
             <a:r>
-              <a:rPr b="1" sz="1450">
+              <a:rPr sz="1450" b="1">
                 <a:solidFill>
                   <a:srgbClr val="0F172A"/>
                 </a:solidFill>
@@ -5306,7 +5404,7 @@
               <a:t>Transmission pérenne : </a:t>
             </a:r>
             <a:r>
-              <a:rPr b="0" sz="1400">
+              <a:rPr sz="1400" b="0">
                 <a:solidFill>
                   <a:srgbClr val="475569"/>
                 </a:solidFill>
@@ -5355,14 +5453,14 @@
           </a:fontRef>
         </p:style>
         <p:txBody>
-          <a:bodyPr rtlCol="0" anchor="ctr" wrap="square" lIns="274320" rIns="274320" tIns="274320" bIns="274320"/>
+          <a:bodyPr wrap="square" lIns="274320" tIns="274320" rIns="274320" bIns="274320" rtlCol="0" anchor="ctr"/>
           <a:lstStyle/>
           <a:p>
             <a:pPr algn="ctr">
               <a:spcAft>
                 <a:spcPts val="1400"/>
               </a:spcAft>
-              <a:defRPr b="1" sz="1500">
+              <a:defRPr sz="1500" b="1">
                 <a:solidFill>
                   <a:srgbClr val="1E40AF"/>
                 </a:solidFill>
@@ -5380,7 +5478,7 @@
               </a:spcAft>
             </a:pPr>
             <a:r>
-              <a:rPr b="1" sz="1200">
+              <a:rPr sz="1200" b="1">
                 <a:solidFill>
                   <a:srgbClr val="0F172A"/>
                 </a:solidFill>
@@ -5405,7 +5503,7 @@
               </a:spcAft>
             </a:pPr>
             <a:r>
-              <a:rPr b="1" sz="1200">
+              <a:rPr sz="1200" b="1">
                 <a:solidFill>
                   <a:srgbClr val="0F172A"/>
                 </a:solidFill>
@@ -5430,7 +5528,7 @@
               </a:spcAft>
             </a:pPr>
             <a:r>
-              <a:rPr b="1" sz="1200">
+              <a:rPr sz="1200" b="1">
                 <a:solidFill>
                   <a:srgbClr val="0F172A"/>
                 </a:solidFill>
@@ -5455,7 +5553,7 @@
               </a:spcAft>
             </a:pPr>
             <a:r>
-              <a:rPr b="1" sz="1200">
+              <a:rPr sz="1200" b="1">
                 <a:solidFill>
                   <a:srgbClr val="0F172A"/>
                 </a:solidFill>
@@ -5480,7 +5578,7 @@
               </a:spcAft>
             </a:pPr>
             <a:r>
-              <a:rPr b="1" sz="1200">
+              <a:rPr sz="1200" b="1">
                 <a:solidFill>
                   <a:srgbClr val="0F172A"/>
                 </a:solidFill>
@@ -5538,7 +5636,7 @@
           </a:fontRef>
         </p:style>
         <p:txBody>
-          <a:bodyPr rtlCol="0" anchor="ctr" wrap="square" lIns="182880" tIns="109728" rIns="182880" bIns="91440"/>
+          <a:bodyPr wrap="square" lIns="182880" tIns="109728" rIns="182880" bIns="91440" rtlCol="0" anchor="ctr"/>
           <a:lstStyle/>
           <a:p>
             <a:pPr algn="ctr">
@@ -5573,7 +5671,7 @@
 </file>
 
 <file path=ppt/slides/slide14.xml><?xml version="1.0" encoding="utf-8"?>
-<p:sld xmlns:a="http://schemas.openxmlformats.org/drawingml/2006/main" xmlns:p="http://schemas.openxmlformats.org/presentationml/2006/main" xmlns:r="http://schemas.openxmlformats.org/officeDocument/2006/relationships">
+<p:sld xmlns:a="http://schemas.openxmlformats.org/drawingml/2006/main" xmlns:r="http://schemas.openxmlformats.org/officeDocument/2006/relationships" xmlns:p="http://schemas.openxmlformats.org/presentationml/2006/main">
   <p:cSld>
     <p:spTree>
       <p:nvGrpSpPr>
@@ -5581,7 +5679,14 @@
         <p:cNvGrpSpPr/>
         <p:nvPr/>
       </p:nvGrpSpPr>
-      <p:grpSpPr/>
+      <p:grpSpPr>
+        <a:xfrm>
+          <a:off x="0" y="0"/>
+          <a:ext cx="0" cy="0"/>
+          <a:chOff x="0" y="0"/>
+          <a:chExt cx="0" cy="0"/>
+        </a:xfrm>
+      </p:grpSpPr>
       <p:sp>
         <p:nvSpPr>
           <p:cNvPr id="2" name="Rounded Rectangle 1"/>
@@ -5620,7 +5725,7 @@
           </a:fontRef>
         </p:style>
         <p:txBody>
-          <a:bodyPr rtlCol="0" anchor="ctr" wrap="square" lIns="0" rIns="0" tIns="0" bIns="0"/>
+          <a:bodyPr wrap="square" lIns="0" tIns="0" rIns="0" bIns="0" rtlCol="0" anchor="ctr"/>
           <a:lstStyle/>
           <a:p>
             <a:pPr algn="ctr">
@@ -5654,7 +5759,7 @@
           <a:noFill/>
         </p:spPr>
         <p:txBody>
-          <a:bodyPr wrap="square" lIns="0" rIns="0" tIns="0" bIns="0">
+          <a:bodyPr wrap="square" lIns="0" tIns="0" rIns="0" bIns="0">
             <a:spAutoFit/>
           </a:bodyPr>
           <a:lstStyle/>
@@ -5690,7 +5795,7 @@
           <a:noFill/>
         </p:spPr>
         <p:txBody>
-          <a:bodyPr wrap="none" lIns="0" rIns="0" tIns="0" bIns="0">
+          <a:bodyPr wrap="none" lIns="0" tIns="0" rIns="0" bIns="0">
             <a:spAutoFit/>
           </a:bodyPr>
           <a:lstStyle/>
@@ -5726,7 +5831,7 @@
           <a:noFill/>
         </p:spPr>
         <p:txBody>
-          <a:bodyPr wrap="none" lIns="0" rIns="0" tIns="0" bIns="0">
+          <a:bodyPr wrap="none" lIns="0" tIns="0" rIns="0" bIns="0">
             <a:spAutoFit/>
           </a:bodyPr>
           <a:lstStyle/>
@@ -5783,7 +5888,7 @@
           </a:fontRef>
         </p:style>
         <p:txBody>
-          <a:bodyPr rtlCol="0" anchor="ctr" wrap="square" lIns="228600" tIns="228600" rIns="228600" bIns="228600"/>
+          <a:bodyPr wrap="square" lIns="228600" tIns="228600" rIns="228600" bIns="228600" rtlCol="0" anchor="ctr"/>
           <a:lstStyle/>
           <a:p>
             <a:pPr algn="ctr">
@@ -5792,7 +5897,7 @@
               </a:spcAft>
             </a:pPr>
             <a:r>
-              <a:rPr b="1" sz="1450">
+              <a:rPr sz="1450" b="1">
                 <a:solidFill>
                   <a:srgbClr val="0F172A"/>
                 </a:solidFill>
@@ -5801,7 +5906,7 @@
               <a:t>Automne 2026 : </a:t>
             </a:r>
             <a:r>
-              <a:rPr b="0" sz="1400">
+              <a:rPr sz="1400" b="0">
                 <a:solidFill>
                   <a:srgbClr val="475569"/>
                 </a:solidFill>
@@ -5817,7 +5922,7 @@
               </a:spcAft>
             </a:pPr>
             <a:r>
-              <a:rPr b="1" sz="1450">
+              <a:rPr sz="1450" b="1">
                 <a:solidFill>
                   <a:srgbClr val="0F172A"/>
                 </a:solidFill>
@@ -5826,7 +5931,7 @@
               <a:t>Hiver 2026-2027 : </a:t>
             </a:r>
             <a:r>
-              <a:rPr b="0" sz="1400">
+              <a:rPr sz="1400" b="0">
                 <a:solidFill>
                   <a:srgbClr val="475569"/>
                 </a:solidFill>
@@ -5842,7 +5947,7 @@
               </a:spcAft>
             </a:pPr>
             <a:r>
-              <a:rPr b="1" sz="1450">
+              <a:rPr sz="1450" b="1">
                 <a:solidFill>
                   <a:srgbClr val="0F172A"/>
                 </a:solidFill>
@@ -5851,7 +5956,7 @@
               <a:t>Printemps 2027 : </a:t>
             </a:r>
             <a:r>
-              <a:rPr b="0" sz="1400">
+              <a:rPr sz="1400" b="0">
                 <a:solidFill>
                   <a:srgbClr val="475569"/>
                 </a:solidFill>
@@ -5867,7 +5972,7 @@
               </a:spcAft>
             </a:pPr>
             <a:r>
-              <a:rPr b="1" sz="1450">
+              <a:rPr sz="1450" b="1">
                 <a:solidFill>
                   <a:srgbClr val="0F172A"/>
                 </a:solidFill>
@@ -5876,7 +5981,7 @@
               <a:t>Mi-2027 : </a:t>
             </a:r>
             <a:r>
-              <a:rPr b="0" sz="1400">
+              <a:rPr sz="1400" b="0">
                 <a:solidFill>
                   <a:srgbClr val="475569"/>
                 </a:solidFill>
@@ -5892,7 +5997,7 @@
               </a:spcAft>
             </a:pPr>
             <a:r>
-              <a:rPr b="1" sz="1450">
+              <a:rPr sz="1450" b="1">
                 <a:solidFill>
                   <a:srgbClr val="0F172A"/>
                 </a:solidFill>
@@ -5901,7 +6006,7 @@
               <a:t>Après-thèse : </a:t>
             </a:r>
             <a:r>
-              <a:rPr b="0" sz="1400">
+              <a:rPr sz="1400" b="0">
                 <a:solidFill>
                   <a:srgbClr val="475569"/>
                 </a:solidFill>
@@ -5950,14 +6055,14 @@
           </a:fontRef>
         </p:style>
         <p:txBody>
-          <a:bodyPr rtlCol="0" anchor="ctr" wrap="square" lIns="274320" rIns="274320" tIns="274320" bIns="274320"/>
+          <a:bodyPr wrap="square" lIns="274320" tIns="274320" rIns="274320" bIns="274320" rtlCol="0" anchor="ctr"/>
           <a:lstStyle/>
           <a:p>
             <a:pPr algn="ctr">
               <a:spcAft>
                 <a:spcPts val="1400"/>
               </a:spcAft>
-              <a:defRPr b="1" sz="1500">
+              <a:defRPr sz="1500" b="1">
                 <a:solidFill>
                   <a:srgbClr val="1E40AF"/>
                 </a:solidFill>
@@ -5975,7 +6080,7 @@
               </a:spcAft>
             </a:pPr>
             <a:r>
-              <a:rPr b="1" sz="1200">
+              <a:rPr sz="1200" b="1">
                 <a:solidFill>
                   <a:srgbClr val="2563EB"/>
                 </a:solidFill>
@@ -6000,7 +6105,7 @@
               </a:spcAft>
             </a:pPr>
             <a:r>
-              <a:rPr b="1" sz="1200">
+              <a:rPr sz="1200" b="1">
                 <a:solidFill>
                   <a:srgbClr val="0EA5E9"/>
                 </a:solidFill>
@@ -6025,7 +6130,7 @@
               </a:spcAft>
             </a:pPr>
             <a:r>
-              <a:rPr b="1" sz="1200">
+              <a:rPr sz="1200" b="1">
                 <a:solidFill>
                   <a:srgbClr val="6366F1"/>
                 </a:solidFill>
@@ -6050,7 +6155,7 @@
               </a:spcAft>
             </a:pPr>
             <a:r>
-              <a:rPr b="1" sz="1200">
+              <a:rPr sz="1200" b="1">
                 <a:solidFill>
                   <a:srgbClr val="A855F7"/>
                 </a:solidFill>
@@ -6075,7 +6180,7 @@
               </a:spcAft>
             </a:pPr>
             <a:r>
-              <a:rPr b="1" sz="1200">
+              <a:rPr sz="1200" b="1">
                 <a:solidFill>
                   <a:srgbClr val="EC4899"/>
                 </a:solidFill>
@@ -6100,7 +6205,7 @@
               </a:spcAft>
             </a:pPr>
             <a:r>
-              <a:rPr b="1" sz="1200">
+              <a:rPr sz="1200" b="1">
                 <a:solidFill>
                   <a:srgbClr val="10B981"/>
                 </a:solidFill>
@@ -6158,7 +6263,7 @@
           </a:fontRef>
         </p:style>
         <p:txBody>
-          <a:bodyPr rtlCol="0" anchor="ctr" wrap="square" lIns="182880" tIns="109728" rIns="182880" bIns="91440"/>
+          <a:bodyPr wrap="square" lIns="182880" tIns="109728" rIns="182880" bIns="91440" rtlCol="0" anchor="ctr"/>
           <a:lstStyle/>
           <a:p>
             <a:pPr algn="ctr">
@@ -6193,7 +6298,7 @@
 </file>
 
 <file path=ppt/slides/slide2.xml><?xml version="1.0" encoding="utf-8"?>
-<p:sld xmlns:a="http://schemas.openxmlformats.org/drawingml/2006/main" xmlns:p="http://schemas.openxmlformats.org/presentationml/2006/main" xmlns:r="http://schemas.openxmlformats.org/officeDocument/2006/relationships">
+<p:sld xmlns:a="http://schemas.openxmlformats.org/drawingml/2006/main" xmlns:r="http://schemas.openxmlformats.org/officeDocument/2006/relationships" xmlns:p="http://schemas.openxmlformats.org/presentationml/2006/main">
   <p:cSld>
     <p:spTree>
       <p:nvGrpSpPr>
@@ -6201,7 +6306,14 @@
         <p:cNvGrpSpPr/>
         <p:nvPr/>
       </p:nvGrpSpPr>
-      <p:grpSpPr/>
+      <p:grpSpPr>
+        <a:xfrm>
+          <a:off x="0" y="0"/>
+          <a:ext cx="0" cy="0"/>
+          <a:chOff x="0" y="0"/>
+          <a:chExt cx="0" cy="0"/>
+        </a:xfrm>
+      </p:grpSpPr>
       <p:sp>
         <p:nvSpPr>
           <p:cNvPr id="2" name="Rounded Rectangle 1"/>
@@ -6240,7 +6352,7 @@
           </a:fontRef>
         </p:style>
         <p:txBody>
-          <a:bodyPr rtlCol="0" anchor="ctr" wrap="square" lIns="0" rIns="0" tIns="0" bIns="0"/>
+          <a:bodyPr wrap="square" lIns="0" tIns="0" rIns="0" bIns="0" rtlCol="0" anchor="ctr"/>
           <a:lstStyle/>
           <a:p>
             <a:pPr algn="ctr">
@@ -6274,7 +6386,7 @@
           <a:noFill/>
         </p:spPr>
         <p:txBody>
-          <a:bodyPr wrap="square" lIns="0" rIns="0" tIns="0" bIns="0">
+          <a:bodyPr wrap="square" lIns="0" tIns="0" rIns="0" bIns="0">
             <a:spAutoFit/>
           </a:bodyPr>
           <a:lstStyle/>
@@ -6310,7 +6422,7 @@
           <a:noFill/>
         </p:spPr>
         <p:txBody>
-          <a:bodyPr wrap="none" lIns="0" rIns="0" tIns="0" bIns="0">
+          <a:bodyPr wrap="none" lIns="0" tIns="0" rIns="0" bIns="0">
             <a:spAutoFit/>
           </a:bodyPr>
           <a:lstStyle/>
@@ -6346,7 +6458,7 @@
           <a:noFill/>
         </p:spPr>
         <p:txBody>
-          <a:bodyPr wrap="none" lIns="0" rIns="0" tIns="0" bIns="0">
+          <a:bodyPr wrap="none" lIns="0" tIns="0" rIns="0" bIns="0">
             <a:spAutoFit/>
           </a:bodyPr>
           <a:lstStyle/>
@@ -6403,33 +6515,8 @@
           </a:fontRef>
         </p:style>
         <p:txBody>
-          <a:bodyPr rtlCol="0" anchor="ctr" wrap="square" lIns="228600" tIns="228600" rIns="228600" bIns="228600"/>
-          <a:lstStyle/>
-          <a:p>
-            <a:pPr algn="ctr">
-              <a:spcAft>
-                <a:spcPts val="1000"/>
-              </a:spcAft>
-            </a:pPr>
-            <a:r>
-              <a:rPr b="1" sz="1450">
-                <a:solidFill>
-                  <a:srgbClr val="0F172A"/>
-                </a:solidFill>
-                <a:latin typeface="Segoe UI"/>
-              </a:rPr>
-              <a:t>Contraste extrême : </a:t>
-            </a:r>
-            <a:r>
-              <a:rPr b="0" sz="1400">
-                <a:solidFill>
-                  <a:srgbClr val="475569"/>
-                </a:solidFill>
-                <a:latin typeface="Segoe UI"/>
-              </a:rPr>
-              <a:t>Séparation angulaire infime et étoile 10⁴ à 10⁶ fois plus brillante en proche IR.</a:t>
-            </a:r>
-          </a:p>
+          <a:bodyPr wrap="square" lIns="228600" tIns="228600" rIns="228600" bIns="228600" rtlCol="0" anchor="ctr"/>
+          <a:lstStyle/>
           <a:p>
             <a:pPr>
               <a:spcAft>
@@ -6437,22 +6524,148 @@
               </a:spcAft>
             </a:pPr>
             <a:r>
-              <a:rPr b="1" sz="1450">
-                <a:solidFill>
-                  <a:srgbClr val="0F172A"/>
-                </a:solidFill>
-                <a:latin typeface="Segoe UI"/>
-              </a:rPr>
-              <a:t>Nulling interférométrique : </a:t>
-            </a:r>
-            <a:r>
-              <a:rPr b="0" sz="1400">
-                <a:solidFill>
-                  <a:srgbClr val="475569"/>
-                </a:solidFill>
-                <a:latin typeface="Segoe UI"/>
-              </a:rPr>
-              <a:t>Extinction destructive axiale de l'étoile hôte ; transmission du signal planétaire hors axe.</a:t>
+              <a:rPr sz="1450" b="1" dirty="0" err="1">
+                <a:solidFill>
+                  <a:srgbClr val="0F172A"/>
+                </a:solidFill>
+                <a:latin typeface="Segoe UI"/>
+              </a:rPr>
+              <a:t>Contraste</a:t>
+            </a:r>
+            <a:r>
+              <a:rPr sz="1450" b="1" dirty="0">
+                <a:solidFill>
+                  <a:srgbClr val="0F172A"/>
+                </a:solidFill>
+                <a:latin typeface="Segoe UI"/>
+              </a:rPr>
+              <a:t> </a:t>
+            </a:r>
+            <a:r>
+              <a:rPr sz="1450" b="1" dirty="0" err="1">
+                <a:solidFill>
+                  <a:srgbClr val="0F172A"/>
+                </a:solidFill>
+                <a:latin typeface="Segoe UI"/>
+              </a:rPr>
+              <a:t>extrême</a:t>
+            </a:r>
+            <a:r>
+              <a:rPr sz="1450" b="1" dirty="0">
+                <a:solidFill>
+                  <a:srgbClr val="0F172A"/>
+                </a:solidFill>
+                <a:latin typeface="Segoe UI"/>
+              </a:rPr>
+              <a:t> : </a:t>
+            </a:r>
+            <a:r>
+              <a:rPr sz="1400" b="0" dirty="0" err="1">
+                <a:solidFill>
+                  <a:srgbClr val="475569"/>
+                </a:solidFill>
+                <a:latin typeface="Segoe UI"/>
+              </a:rPr>
+              <a:t>Séparation</a:t>
+            </a:r>
+            <a:r>
+              <a:rPr sz="1400" b="0" dirty="0">
+                <a:solidFill>
+                  <a:srgbClr val="475569"/>
+                </a:solidFill>
+                <a:latin typeface="Segoe UI"/>
+              </a:rPr>
+              <a:t> </a:t>
+            </a:r>
+            <a:r>
+              <a:rPr sz="1400" b="0" dirty="0" err="1">
+                <a:solidFill>
+                  <a:srgbClr val="475569"/>
+                </a:solidFill>
+                <a:latin typeface="Segoe UI"/>
+              </a:rPr>
+              <a:t>angulaire</a:t>
+            </a:r>
+            <a:r>
+              <a:rPr sz="1400" b="0" dirty="0">
+                <a:solidFill>
+                  <a:srgbClr val="475569"/>
+                </a:solidFill>
+                <a:latin typeface="Segoe UI"/>
+              </a:rPr>
+              <a:t> </a:t>
+            </a:r>
+            <a:r>
+              <a:rPr sz="1400" b="0" dirty="0" err="1">
+                <a:solidFill>
+                  <a:srgbClr val="475569"/>
+                </a:solidFill>
+                <a:latin typeface="Segoe UI"/>
+              </a:rPr>
+              <a:t>infime</a:t>
+            </a:r>
+            <a:r>
+              <a:rPr sz="1400" b="0" dirty="0">
+                <a:solidFill>
+                  <a:srgbClr val="475569"/>
+                </a:solidFill>
+                <a:latin typeface="Segoe UI"/>
+              </a:rPr>
+              <a:t> et étoile 10⁴ à 10⁶ </a:t>
+            </a:r>
+            <a:r>
+              <a:rPr sz="1400" b="0" dirty="0" err="1">
+                <a:solidFill>
+                  <a:srgbClr val="475569"/>
+                </a:solidFill>
+                <a:latin typeface="Segoe UI"/>
+              </a:rPr>
+              <a:t>fois</a:t>
+            </a:r>
+            <a:r>
+              <a:rPr sz="1400" b="0" dirty="0">
+                <a:solidFill>
+                  <a:srgbClr val="475569"/>
+                </a:solidFill>
+                <a:latin typeface="Segoe UI"/>
+              </a:rPr>
+              <a:t> plus brillante </a:t>
+            </a:r>
+            <a:r>
+              <a:rPr sz="1400" b="0" dirty="0" err="1">
+                <a:solidFill>
+                  <a:srgbClr val="475569"/>
+                </a:solidFill>
+                <a:latin typeface="Segoe UI"/>
+              </a:rPr>
+              <a:t>en</a:t>
+            </a:r>
+            <a:r>
+              <a:rPr sz="1400" b="0" dirty="0">
+                <a:solidFill>
+                  <a:srgbClr val="475569"/>
+                </a:solidFill>
+                <a:latin typeface="Segoe UI"/>
+              </a:rPr>
+              <a:t> </a:t>
+            </a:r>
+            <a:r>
+              <a:rPr sz="1400" b="0" dirty="0" err="1">
+                <a:solidFill>
+                  <a:srgbClr val="475569"/>
+                </a:solidFill>
+                <a:latin typeface="Segoe UI"/>
+              </a:rPr>
+              <a:t>proche</a:t>
+            </a:r>
+            <a:r>
+              <a:rPr sz="1400" b="0" dirty="0">
+                <a:solidFill>
+                  <a:srgbClr val="475569"/>
+                </a:solidFill>
+                <a:latin typeface="Segoe UI"/>
+              </a:rPr>
+              <a:t> IR.</a:t>
             </a:r>
           </a:p>
           <a:p>
@@ -6462,22 +6675,112 @@
               </a:spcAft>
             </a:pPr>
             <a:r>
-              <a:rPr b="1" sz="1450">
-                <a:solidFill>
-                  <a:srgbClr val="0F172A"/>
-                </a:solidFill>
-                <a:latin typeface="Segoe UI"/>
-              </a:rPr>
-              <a:t>Sensibilité aux pistons : </a:t>
-            </a:r>
-            <a:r>
-              <a:rPr b="0" sz="1400">
-                <a:solidFill>
-                  <a:srgbClr val="475569"/>
-                </a:solidFill>
-                <a:latin typeface="Segoe UI"/>
-              </a:rPr>
-              <a:t>Les perturbations de phase dégradent immédiatement l'annulation.</a:t>
+              <a:rPr sz="1450" b="1" dirty="0">
+                <a:solidFill>
+                  <a:srgbClr val="0F172A"/>
+                </a:solidFill>
+                <a:latin typeface="Segoe UI"/>
+              </a:rPr>
+              <a:t>Nulling </a:t>
+            </a:r>
+            <a:r>
+              <a:rPr sz="1450" b="1" dirty="0" err="1">
+                <a:solidFill>
+                  <a:srgbClr val="0F172A"/>
+                </a:solidFill>
+                <a:latin typeface="Segoe UI"/>
+              </a:rPr>
+              <a:t>interférométrique</a:t>
+            </a:r>
+            <a:r>
+              <a:rPr sz="1450" b="1" dirty="0">
+                <a:solidFill>
+                  <a:srgbClr val="0F172A"/>
+                </a:solidFill>
+                <a:latin typeface="Segoe UI"/>
+              </a:rPr>
+              <a:t> : </a:t>
+            </a:r>
+            <a:r>
+              <a:rPr sz="1400" b="0" dirty="0">
+                <a:solidFill>
+                  <a:srgbClr val="475569"/>
+                </a:solidFill>
+                <a:latin typeface="Segoe UI"/>
+              </a:rPr>
+              <a:t>Extinction destructive </a:t>
+            </a:r>
+            <a:r>
+              <a:rPr sz="1400" b="0" dirty="0" err="1">
+                <a:solidFill>
+                  <a:srgbClr val="475569"/>
+                </a:solidFill>
+                <a:latin typeface="Segoe UI"/>
+              </a:rPr>
+              <a:t>axiale</a:t>
+            </a:r>
+            <a:r>
+              <a:rPr sz="1400" b="0" dirty="0">
+                <a:solidFill>
+                  <a:srgbClr val="475569"/>
+                </a:solidFill>
+                <a:latin typeface="Segoe UI"/>
+              </a:rPr>
+              <a:t> de </a:t>
+            </a:r>
+            <a:r>
+              <a:rPr sz="1400" b="0" dirty="0" err="1">
+                <a:solidFill>
+                  <a:srgbClr val="475569"/>
+                </a:solidFill>
+                <a:latin typeface="Segoe UI"/>
+              </a:rPr>
+              <a:t>l'étoile</a:t>
+            </a:r>
+            <a:r>
+              <a:rPr sz="1400" b="0" dirty="0">
+                <a:solidFill>
+                  <a:srgbClr val="475569"/>
+                </a:solidFill>
+                <a:latin typeface="Segoe UI"/>
+              </a:rPr>
+              <a:t> </a:t>
+            </a:r>
+            <a:r>
+              <a:rPr sz="1400" b="0" dirty="0" err="1">
+                <a:solidFill>
+                  <a:srgbClr val="475569"/>
+                </a:solidFill>
+                <a:latin typeface="Segoe UI"/>
+              </a:rPr>
+              <a:t>hôte</a:t>
+            </a:r>
+            <a:r>
+              <a:rPr sz="1400" b="0" dirty="0">
+                <a:solidFill>
+                  <a:srgbClr val="475569"/>
+                </a:solidFill>
+                <a:latin typeface="Segoe UI"/>
+              </a:rPr>
+              <a:t> ; transmission du signal </a:t>
+            </a:r>
+            <a:r>
+              <a:rPr sz="1400" b="0" dirty="0" err="1">
+                <a:solidFill>
+                  <a:srgbClr val="475569"/>
+                </a:solidFill>
+                <a:latin typeface="Segoe UI"/>
+              </a:rPr>
+              <a:t>planétaire</a:t>
+            </a:r>
+            <a:r>
+              <a:rPr sz="1400" b="0" dirty="0">
+                <a:solidFill>
+                  <a:srgbClr val="475569"/>
+                </a:solidFill>
+                <a:latin typeface="Segoe UI"/>
+              </a:rPr>
+              <a:t> hors axe.</a:t>
             </a:r>
           </a:p>
           <a:p>
@@ -6487,22 +6790,85 @@
               </a:spcAft>
             </a:pPr>
             <a:r>
-              <a:rPr b="1" sz="1450">
-                <a:solidFill>
-                  <a:srgbClr val="0F172A"/>
-                </a:solidFill>
-                <a:latin typeface="Segoe UI"/>
-              </a:rPr>
-              <a:t>Observable Kernel-Null : </a:t>
-            </a:r>
-            <a:r>
-              <a:rPr b="0" sz="1400">
-                <a:solidFill>
-                  <a:srgbClr val="475569"/>
-                </a:solidFill>
-                <a:latin typeface="Segoe UI"/>
-              </a:rPr>
-              <a:t>Combinaison linéaire de sorties insensible au 1er ordre aux erreurs de phase.</a:t>
+              <a:rPr sz="1450" b="1" dirty="0" err="1">
+                <a:solidFill>
+                  <a:srgbClr val="0F172A"/>
+                </a:solidFill>
+                <a:latin typeface="Segoe UI"/>
+              </a:rPr>
+              <a:t>Sensibilité</a:t>
+            </a:r>
+            <a:r>
+              <a:rPr sz="1450" b="1" dirty="0">
+                <a:solidFill>
+                  <a:srgbClr val="0F172A"/>
+                </a:solidFill>
+                <a:latin typeface="Segoe UI"/>
+              </a:rPr>
+              <a:t> aux pistons : </a:t>
+            </a:r>
+            <a:r>
+              <a:rPr sz="1400" b="0" dirty="0">
+                <a:solidFill>
+                  <a:srgbClr val="475569"/>
+                </a:solidFill>
+                <a:latin typeface="Segoe UI"/>
+              </a:rPr>
+              <a:t>Les perturbations de phase </a:t>
+            </a:r>
+            <a:r>
+              <a:rPr sz="1400" b="0" dirty="0" err="1">
+                <a:solidFill>
+                  <a:srgbClr val="475569"/>
+                </a:solidFill>
+                <a:latin typeface="Segoe UI"/>
+              </a:rPr>
+              <a:t>dégradent</a:t>
+            </a:r>
+            <a:r>
+              <a:rPr sz="1400" b="0" dirty="0">
+                <a:solidFill>
+                  <a:srgbClr val="475569"/>
+                </a:solidFill>
+                <a:latin typeface="Segoe UI"/>
+              </a:rPr>
+              <a:t> </a:t>
+            </a:r>
+            <a:r>
+              <a:rPr sz="1400" b="0" dirty="0" err="1">
+                <a:solidFill>
+                  <a:srgbClr val="475569"/>
+                </a:solidFill>
+                <a:latin typeface="Segoe UI"/>
+              </a:rPr>
+              <a:t>immédiatement</a:t>
+            </a:r>
+            <a:r>
+              <a:rPr sz="1400" b="0" dirty="0">
+                <a:solidFill>
+                  <a:srgbClr val="475569"/>
+                </a:solidFill>
+                <a:latin typeface="Segoe UI"/>
+              </a:rPr>
+              <a:t> </a:t>
+            </a:r>
+            <a:r>
+              <a:rPr sz="1400" b="0" dirty="0" err="1">
+                <a:solidFill>
+                  <a:srgbClr val="475569"/>
+                </a:solidFill>
+                <a:latin typeface="Segoe UI"/>
+              </a:rPr>
+              <a:t>l'annulation</a:t>
+            </a:r>
+            <a:r>
+              <a:rPr sz="1400" b="0" dirty="0">
+                <a:solidFill>
+                  <a:srgbClr val="475569"/>
+                </a:solidFill>
+                <a:latin typeface="Segoe UI"/>
+              </a:rPr>
+              <a:t>.</a:t>
             </a:r>
           </a:p>
           <a:p>
@@ -6512,7 +6878,95 @@
               </a:spcAft>
             </a:pPr>
             <a:r>
-              <a:rPr b="1" sz="1450">
+              <a:rPr sz="1450" b="1" dirty="0">
+                <a:solidFill>
+                  <a:srgbClr val="0F172A"/>
+                </a:solidFill>
+                <a:latin typeface="Segoe UI"/>
+              </a:rPr>
+              <a:t>Observable Kernel-Null : </a:t>
+            </a:r>
+            <a:r>
+              <a:rPr sz="1400" b="0" dirty="0" err="1">
+                <a:solidFill>
+                  <a:srgbClr val="475569"/>
+                </a:solidFill>
+                <a:latin typeface="Segoe UI"/>
+              </a:rPr>
+              <a:t>Combinaison</a:t>
+            </a:r>
+            <a:r>
+              <a:rPr sz="1400" b="0" dirty="0">
+                <a:solidFill>
+                  <a:srgbClr val="475569"/>
+                </a:solidFill>
+                <a:latin typeface="Segoe UI"/>
+              </a:rPr>
+              <a:t> </a:t>
+            </a:r>
+            <a:r>
+              <a:rPr sz="1400" b="0" dirty="0" err="1">
+                <a:solidFill>
+                  <a:srgbClr val="475569"/>
+                </a:solidFill>
+                <a:latin typeface="Segoe UI"/>
+              </a:rPr>
+              <a:t>linéaire</a:t>
+            </a:r>
+            <a:r>
+              <a:rPr sz="1400" b="0" dirty="0">
+                <a:solidFill>
+                  <a:srgbClr val="475569"/>
+                </a:solidFill>
+                <a:latin typeface="Segoe UI"/>
+              </a:rPr>
+              <a:t> de sorties insensible au 1er </a:t>
+            </a:r>
+            <a:r>
+              <a:rPr sz="1400" b="0" dirty="0" err="1">
+                <a:solidFill>
+                  <a:srgbClr val="475569"/>
+                </a:solidFill>
+                <a:latin typeface="Segoe UI"/>
+              </a:rPr>
+              <a:t>ordre</a:t>
+            </a:r>
+            <a:r>
+              <a:rPr sz="1400" b="0" dirty="0">
+                <a:solidFill>
+                  <a:srgbClr val="475569"/>
+                </a:solidFill>
+                <a:latin typeface="Segoe UI"/>
+              </a:rPr>
+              <a:t> aux </a:t>
+            </a:r>
+            <a:r>
+              <a:rPr sz="1400" b="0" dirty="0" err="1">
+                <a:solidFill>
+                  <a:srgbClr val="475569"/>
+                </a:solidFill>
+                <a:latin typeface="Segoe UI"/>
+              </a:rPr>
+              <a:t>erreurs</a:t>
+            </a:r>
+            <a:r>
+              <a:rPr sz="1400" b="0" dirty="0">
+                <a:solidFill>
+                  <a:srgbClr val="475569"/>
+                </a:solidFill>
+                <a:latin typeface="Segoe UI"/>
+              </a:rPr>
+              <a:t> de phase.</a:t>
+            </a:r>
+          </a:p>
+          <a:p>
+            <a:pPr>
+              <a:spcAft>
+                <a:spcPts val="1000"/>
+              </a:spcAft>
+            </a:pPr>
+            <a:r>
+              <a:rPr sz="1450" b="1" dirty="0">
                 <a:solidFill>
                   <a:srgbClr val="0F172A"/>
                 </a:solidFill>
@@ -6521,13 +6975,112 @@
               <a:t>Puce active MMI 4x4 : </a:t>
             </a:r>
             <a:r>
-              <a:rPr b="0" sz="1400">
-                <a:solidFill>
-                  <a:srgbClr val="475569"/>
-                </a:solidFill>
-                <a:latin typeface="Segoe UI"/>
-              </a:rPr>
-              <a:t>Recombinaison intégrée compacte + 4 actionneurs thermo-optiques (TOPAs) en entrée.</a:t>
+              <a:rPr sz="1400" b="0" dirty="0" err="1">
+                <a:solidFill>
+                  <a:srgbClr val="475569"/>
+                </a:solidFill>
+                <a:latin typeface="Segoe UI"/>
+              </a:rPr>
+              <a:t>Recombinaison</a:t>
+            </a:r>
+            <a:r>
+              <a:rPr sz="1400" b="0" dirty="0">
+                <a:solidFill>
+                  <a:srgbClr val="475569"/>
+                </a:solidFill>
+                <a:latin typeface="Segoe UI"/>
+              </a:rPr>
+              <a:t> </a:t>
+            </a:r>
+            <a:r>
+              <a:rPr sz="1400" b="0" dirty="0" err="1">
+                <a:solidFill>
+                  <a:srgbClr val="475569"/>
+                </a:solidFill>
+                <a:latin typeface="Segoe UI"/>
+              </a:rPr>
+              <a:t>intégrée</a:t>
+            </a:r>
+            <a:r>
+              <a:rPr sz="1400" b="0" dirty="0">
+                <a:solidFill>
+                  <a:srgbClr val="475569"/>
+                </a:solidFill>
+                <a:latin typeface="Segoe UI"/>
+              </a:rPr>
+              <a:t> </a:t>
+            </a:r>
+            <a:r>
+              <a:rPr sz="1400" b="0" dirty="0" err="1">
+                <a:solidFill>
+                  <a:srgbClr val="475569"/>
+                </a:solidFill>
+                <a:latin typeface="Segoe UI"/>
+              </a:rPr>
+              <a:t>compacte</a:t>
+            </a:r>
+            <a:r>
+              <a:rPr sz="1400" b="0" dirty="0">
+                <a:solidFill>
+                  <a:srgbClr val="475569"/>
+                </a:solidFill>
+                <a:latin typeface="Segoe UI"/>
+              </a:rPr>
+              <a:t> + 4 </a:t>
+            </a:r>
+            <a:r>
+              <a:rPr sz="1400" b="0" dirty="0" err="1">
+                <a:solidFill>
+                  <a:srgbClr val="475569"/>
+                </a:solidFill>
+                <a:latin typeface="Segoe UI"/>
+              </a:rPr>
+              <a:t>actionneurs</a:t>
+            </a:r>
+            <a:r>
+              <a:rPr sz="1400" b="0" dirty="0">
+                <a:solidFill>
+                  <a:srgbClr val="475569"/>
+                </a:solidFill>
+                <a:latin typeface="Segoe UI"/>
+              </a:rPr>
+              <a:t> thermo-</a:t>
+            </a:r>
+            <a:r>
+              <a:rPr sz="1400" b="0" dirty="0" err="1">
+                <a:solidFill>
+                  <a:srgbClr val="475569"/>
+                </a:solidFill>
+                <a:latin typeface="Segoe UI"/>
+              </a:rPr>
+              <a:t>optiques</a:t>
+            </a:r>
+            <a:r>
+              <a:rPr sz="1400" b="0" dirty="0">
+                <a:solidFill>
+                  <a:srgbClr val="475569"/>
+                </a:solidFill>
+                <a:latin typeface="Segoe UI"/>
+              </a:rPr>
+              <a:t> (TOPAs) </a:t>
+            </a:r>
+            <a:r>
+              <a:rPr sz="1400" b="0" dirty="0" err="1">
+                <a:solidFill>
+                  <a:srgbClr val="475569"/>
+                </a:solidFill>
+                <a:latin typeface="Segoe UI"/>
+              </a:rPr>
+              <a:t>en</a:t>
+            </a:r>
+            <a:r>
+              <a:rPr sz="1400" b="0" dirty="0">
+                <a:solidFill>
+                  <a:srgbClr val="475569"/>
+                </a:solidFill>
+                <a:latin typeface="Segoe UI"/>
+              </a:rPr>
+              <a:t> entrée.</a:t>
             </a:r>
           </a:p>
         </p:txBody>
@@ -6574,6 +7127,7 @@
           <a:lstStyle/>
           <a:p>
             <a:pPr algn="ctr"/>
+            <a:endParaRPr/>
           </a:p>
         </p:txBody>
       </p:sp>
@@ -6618,7 +7172,7 @@
           <a:noFill/>
         </p:spPr>
         <p:txBody>
-          <a:bodyPr wrap="square" lIns="0" rIns="0" tIns="0" bIns="0">
+          <a:bodyPr wrap="square" lIns="0" tIns="0" rIns="0" bIns="0">
             <a:spAutoFit/>
           </a:bodyPr>
           <a:lstStyle/>
@@ -6675,7 +7229,7 @@
           </a:fontRef>
         </p:style>
         <p:txBody>
-          <a:bodyPr rtlCol="0" anchor="ctr" wrap="square" lIns="182880" tIns="109728" rIns="182880" bIns="91440"/>
+          <a:bodyPr wrap="square" lIns="182880" tIns="109728" rIns="182880" bIns="91440" rtlCol="0" anchor="ctr"/>
           <a:lstStyle/>
           <a:p>
             <a:pPr algn="ctr">
@@ -6710,7 +7264,7 @@
 </file>
 
 <file path=ppt/slides/slide3.xml><?xml version="1.0" encoding="utf-8"?>
-<p:sld xmlns:a="http://schemas.openxmlformats.org/drawingml/2006/main" xmlns:p="http://schemas.openxmlformats.org/presentationml/2006/main" xmlns:r="http://schemas.openxmlformats.org/officeDocument/2006/relationships">
+<p:sld xmlns:a="http://schemas.openxmlformats.org/drawingml/2006/main" xmlns:r="http://schemas.openxmlformats.org/officeDocument/2006/relationships" xmlns:p="http://schemas.openxmlformats.org/presentationml/2006/main">
   <p:cSld>
     <p:spTree>
       <p:nvGrpSpPr>
@@ -6718,7 +7272,14 @@
         <p:cNvGrpSpPr/>
         <p:nvPr/>
       </p:nvGrpSpPr>
-      <p:grpSpPr/>
+      <p:grpSpPr>
+        <a:xfrm>
+          <a:off x="0" y="0"/>
+          <a:ext cx="0" cy="0"/>
+          <a:chOff x="0" y="0"/>
+          <a:chExt cx="0" cy="0"/>
+        </a:xfrm>
+      </p:grpSpPr>
       <p:sp>
         <p:nvSpPr>
           <p:cNvPr id="2" name="Rounded Rectangle 1"/>
@@ -6757,7 +7318,7 @@
           </a:fontRef>
         </p:style>
         <p:txBody>
-          <a:bodyPr rtlCol="0" anchor="ctr" wrap="square" lIns="0" rIns="0" tIns="0" bIns="0"/>
+          <a:bodyPr wrap="square" lIns="0" tIns="0" rIns="0" bIns="0" rtlCol="0" anchor="ctr"/>
           <a:lstStyle/>
           <a:p>
             <a:pPr algn="ctr">
@@ -6791,7 +7352,7 @@
           <a:noFill/>
         </p:spPr>
         <p:txBody>
-          <a:bodyPr wrap="square" lIns="0" rIns="0" tIns="0" bIns="0">
+          <a:bodyPr wrap="square" lIns="0" tIns="0" rIns="0" bIns="0">
             <a:spAutoFit/>
           </a:bodyPr>
           <a:lstStyle/>
@@ -6827,7 +7388,7 @@
           <a:noFill/>
         </p:spPr>
         <p:txBody>
-          <a:bodyPr wrap="none" lIns="0" rIns="0" tIns="0" bIns="0">
+          <a:bodyPr wrap="none" lIns="0" tIns="0" rIns="0" bIns="0">
             <a:spAutoFit/>
           </a:bodyPr>
           <a:lstStyle/>
@@ -6863,7 +7424,7 @@
           <a:noFill/>
         </p:spPr>
         <p:txBody>
-          <a:bodyPr wrap="none" lIns="0" rIns="0" tIns="0" bIns="0">
+          <a:bodyPr wrap="none" lIns="0" tIns="0" rIns="0" bIns="0">
             <a:spAutoFit/>
           </a:bodyPr>
           <a:lstStyle/>
@@ -6920,7 +7481,7 @@
           </a:fontRef>
         </p:style>
         <p:txBody>
-          <a:bodyPr rtlCol="0" anchor="ctr" wrap="square" lIns="228600" tIns="228600" rIns="228600" bIns="228600"/>
+          <a:bodyPr wrap="square" lIns="228600" tIns="228600" rIns="228600" bIns="228600" rtlCol="0" anchor="ctr"/>
           <a:lstStyle/>
           <a:p>
             <a:pPr algn="ctr">
@@ -6929,7 +7490,7 @@
               </a:spcAft>
             </a:pPr>
             <a:r>
-              <a:rPr b="1" sz="1450">
+              <a:rPr sz="1450" b="1">
                 <a:solidFill>
                   <a:srgbClr val="0F172A"/>
                 </a:solidFill>
@@ -6938,7 +7499,7 @@
               <a:t>CSI 2025 → CSI 2026 : </a:t>
             </a:r>
             <a:r>
-              <a:rPr b="0" sz="1400">
+              <a:rPr sz="1400" b="0">
                 <a:solidFill>
                   <a:srgbClr val="475569"/>
                 </a:solidFill>
@@ -6954,7 +7515,7 @@
               </a:spcAft>
             </a:pPr>
             <a:r>
-              <a:rPr b="1" sz="1450">
+              <a:rPr sz="1450" b="1">
                 <a:solidFill>
                   <a:srgbClr val="0F172A"/>
                 </a:solidFill>
@@ -6963,7 +7524,7 @@
               <a:t>Modélisation statistique : </a:t>
             </a:r>
             <a:r>
-              <a:rPr b="0" sz="1400">
+              <a:rPr sz="1400" b="0">
                 <a:solidFill>
                   <a:srgbClr val="475569"/>
                 </a:solidFill>
@@ -6979,7 +7540,7 @@
               </a:spcAft>
             </a:pPr>
             <a:r>
-              <a:rPr b="1" sz="1450">
+              <a:rPr sz="1450" b="1">
                 <a:solidFill>
                   <a:srgbClr val="0F172A"/>
                 </a:solidFill>
@@ -6988,7 +7549,7 @@
               <a:t>Dispersion chromatique : </a:t>
             </a:r>
             <a:r>
-              <a:rPr b="0" sz="1400">
+              <a:rPr sz="1400" b="0">
                 <a:solidFill>
                   <a:srgbClr val="475569"/>
                 </a:solidFill>
@@ -7004,7 +7565,7 @@
               </a:spcAft>
             </a:pPr>
             <a:r>
-              <a:rPr b="1" sz="1450">
+              <a:rPr sz="1450" b="1">
                 <a:solidFill>
                   <a:srgbClr val="0F172A"/>
                 </a:solidFill>
@@ -7013,7 +7574,7 @@
               <a:t>Banc &amp; PHOBos : </a:t>
             </a:r>
             <a:r>
-              <a:rPr b="0" sz="1400">
+              <a:rPr sz="1400" b="0">
                 <a:solidFill>
                   <a:srgbClr val="475569"/>
                 </a:solidFill>
@@ -7029,7 +7590,7 @@
               </a:spcAft>
             </a:pPr>
             <a:r>
-              <a:rPr b="1" sz="1450">
+              <a:rPr sz="1450" b="1">
                 <a:solidFill>
                   <a:srgbClr val="0F172A"/>
                 </a:solidFill>
@@ -7038,7 +7599,7 @@
               <a:t>Confrontation modèle/mesures : </a:t>
             </a:r>
             <a:r>
-              <a:rPr b="0" sz="1400">
+              <a:rPr sz="1400" b="0">
                 <a:solidFill>
                   <a:srgbClr val="475569"/>
                 </a:solidFill>
@@ -7054,7 +7615,7 @@
               </a:spcAft>
             </a:pPr>
             <a:r>
-              <a:rPr b="1" sz="1450">
+              <a:rPr sz="1450" b="1">
                 <a:solidFill>
                   <a:srgbClr val="0F172A"/>
                 </a:solidFill>
@@ -7063,7 +7624,7 @@
               <a:t>Valorisation : </a:t>
             </a:r>
             <a:r>
-              <a:rPr b="0" sz="1400">
+              <a:rPr sz="1400" b="0">
                 <a:solidFill>
                   <a:srgbClr val="475569"/>
                 </a:solidFill>
@@ -7112,14 +7673,14 @@
           </a:fontRef>
         </p:style>
         <p:txBody>
-          <a:bodyPr rtlCol="0" anchor="ctr" wrap="square" lIns="274320" rIns="274320" tIns="274320" bIns="274320"/>
+          <a:bodyPr wrap="square" lIns="274320" tIns="274320" rIns="274320" bIns="274320" rtlCol="0" anchor="ctr"/>
           <a:lstStyle/>
           <a:p>
             <a:pPr algn="ctr">
               <a:spcAft>
                 <a:spcPts val="1400"/>
               </a:spcAft>
-              <a:defRPr b="1" sz="1500">
+              <a:defRPr sz="1500" b="1">
                 <a:solidFill>
                   <a:srgbClr val="1E40AF"/>
                 </a:solidFill>
@@ -7137,7 +7698,7 @@
               </a:spcAft>
             </a:pPr>
             <a:r>
-              <a:rPr b="1" sz="1250">
+              <a:rPr sz="1250" b="1">
                 <a:solidFill>
                   <a:srgbClr val="0F172A"/>
                 </a:solidFill>
@@ -7155,7 +7716,7 @@
               <a:t>Médiane validée vs Neyman-Pearson sous turbulence </a:t>
             </a:r>
             <a:r>
-              <a:rPr b="1" sz="1150">
+              <a:rPr sz="1150" b="1">
                 <a:solidFill>
                   <a:srgbClr val="10B981"/>
                 </a:solidFill>
@@ -7171,7 +7732,7 @@
               </a:spcAft>
             </a:pPr>
             <a:r>
-              <a:rPr b="1" sz="1250">
+              <a:rPr sz="1250" b="1">
                 <a:solidFill>
                   <a:srgbClr val="0F172A"/>
                 </a:solidFill>
@@ -7189,7 +7750,7 @@
               <a:t>Réponse chromatique modélisée dans PHISE </a:t>
             </a:r>
             <a:r>
-              <a:rPr b="1" sz="1150">
+              <a:rPr sz="1150" b="1">
                 <a:solidFill>
                   <a:srgbClr val="10B981"/>
                 </a:solidFill>
@@ -7205,7 +7766,7 @@
               </a:spcAft>
             </a:pPr>
             <a:r>
-              <a:rPr b="1" sz="1250">
+              <a:rPr sz="1250" b="1">
                 <a:solidFill>
                   <a:srgbClr val="0F172A"/>
                 </a:solidFill>
@@ -7223,7 +7784,7 @@
               <a:t>Logiciel PHOBos opérationnel &amp; acquisition fluide </a:t>
             </a:r>
             <a:r>
-              <a:rPr b="1" sz="1150">
+              <a:rPr sz="1150" b="1">
                 <a:solidFill>
                   <a:srgbClr val="10B981"/>
                 </a:solidFill>
@@ -7239,7 +7800,7 @@
               </a:spcAft>
             </a:pPr>
             <a:r>
-              <a:rPr b="1" sz="1250">
+              <a:rPr sz="1250" b="1">
                 <a:solidFill>
                   <a:srgbClr val="0F172A"/>
                 </a:solidFill>
@@ -7257,7 +7818,7 @@
               <a:t>Null depth franchissant le seuil des 10⁻³ </a:t>
             </a:r>
             <a:r>
-              <a:rPr b="1" sz="1150">
+              <a:rPr sz="1150" b="1">
                 <a:solidFill>
                   <a:srgbClr val="10B981"/>
                 </a:solidFill>
@@ -7273,7 +7834,7 @@
               </a:spcAft>
             </a:pPr>
             <a:r>
-              <a:rPr b="1" sz="1250">
+              <a:rPr sz="1250" b="1">
                 <a:solidFill>
                   <a:srgbClr val="0F172A"/>
                 </a:solidFill>
@@ -7291,7 +7852,7 @@
               <a:t>Modèle CMPCE &amp; simulation détecteur C-RED 3 </a:t>
             </a:r>
             <a:r>
-              <a:rPr b="1" sz="1150">
+              <a:rPr sz="1150" b="1">
                 <a:solidFill>
                   <a:srgbClr val="10B981"/>
                 </a:solidFill>
@@ -7307,7 +7868,7 @@
               </a:spcAft>
             </a:pPr>
             <a:r>
-              <a:rPr b="1" sz="1250">
+              <a:rPr sz="1250" b="1">
                 <a:solidFill>
                   <a:srgbClr val="0F172A"/>
                 </a:solidFill>
@@ -7325,7 +7886,7 @@
               <a:t>Manuscrit 4x4 MMI en relecture co-auteurs </a:t>
             </a:r>
             <a:r>
-              <a:rPr b="1" sz="1150">
+              <a:rPr sz="1150" b="1">
                 <a:solidFill>
                   <a:srgbClr val="F59E0B"/>
                 </a:solidFill>
@@ -7374,7 +7935,7 @@
           </a:fontRef>
         </p:style>
         <p:txBody>
-          <a:bodyPr rtlCol="0" anchor="ctr" wrap="square" lIns="182880" tIns="109728" rIns="182880" bIns="91440"/>
+          <a:bodyPr wrap="square" lIns="182880" tIns="109728" rIns="182880" bIns="91440" rtlCol="0" anchor="ctr"/>
           <a:lstStyle/>
           <a:p>
             <a:pPr algn="ctr">
@@ -7409,7 +7970,7 @@
 </file>
 
 <file path=ppt/slides/slide4.xml><?xml version="1.0" encoding="utf-8"?>
-<p:sld xmlns:a="http://schemas.openxmlformats.org/drawingml/2006/main" xmlns:p="http://schemas.openxmlformats.org/presentationml/2006/main" xmlns:r="http://schemas.openxmlformats.org/officeDocument/2006/relationships">
+<p:sld xmlns:a="http://schemas.openxmlformats.org/drawingml/2006/main" xmlns:r="http://schemas.openxmlformats.org/officeDocument/2006/relationships" xmlns:p="http://schemas.openxmlformats.org/presentationml/2006/main">
   <p:cSld>
     <p:spTree>
       <p:nvGrpSpPr>
@@ -7417,7 +7978,14 @@
         <p:cNvGrpSpPr/>
         <p:nvPr/>
       </p:nvGrpSpPr>
-      <p:grpSpPr/>
+      <p:grpSpPr>
+        <a:xfrm>
+          <a:off x="0" y="0"/>
+          <a:ext cx="0" cy="0"/>
+          <a:chOff x="0" y="0"/>
+          <a:chExt cx="0" cy="0"/>
+        </a:xfrm>
+      </p:grpSpPr>
       <p:sp>
         <p:nvSpPr>
           <p:cNvPr id="2" name="Rounded Rectangle 1"/>
@@ -7456,7 +8024,7 @@
           </a:fontRef>
         </p:style>
         <p:txBody>
-          <a:bodyPr rtlCol="0" anchor="ctr" wrap="square" lIns="0" rIns="0" tIns="0" bIns="0"/>
+          <a:bodyPr wrap="square" lIns="0" tIns="0" rIns="0" bIns="0" rtlCol="0" anchor="ctr"/>
           <a:lstStyle/>
           <a:p>
             <a:pPr algn="ctr">
@@ -7490,7 +8058,7 @@
           <a:noFill/>
         </p:spPr>
         <p:txBody>
-          <a:bodyPr wrap="square" lIns="0" rIns="0" tIns="0" bIns="0">
+          <a:bodyPr wrap="square" lIns="0" tIns="0" rIns="0" bIns="0">
             <a:spAutoFit/>
           </a:bodyPr>
           <a:lstStyle/>
@@ -7526,7 +8094,7 @@
           <a:noFill/>
         </p:spPr>
         <p:txBody>
-          <a:bodyPr wrap="none" lIns="0" rIns="0" tIns="0" bIns="0">
+          <a:bodyPr wrap="none" lIns="0" tIns="0" rIns="0" bIns="0">
             <a:spAutoFit/>
           </a:bodyPr>
           <a:lstStyle/>
@@ -7562,7 +8130,7 @@
           <a:noFill/>
         </p:spPr>
         <p:txBody>
-          <a:bodyPr wrap="none" lIns="0" rIns="0" tIns="0" bIns="0">
+          <a:bodyPr wrap="none" lIns="0" tIns="0" rIns="0" bIns="0">
             <a:spAutoFit/>
           </a:bodyPr>
           <a:lstStyle/>
@@ -7619,7 +8187,7 @@
           </a:fontRef>
         </p:style>
         <p:txBody>
-          <a:bodyPr rtlCol="0" anchor="ctr" wrap="square" lIns="228600" tIns="228600" rIns="228600" bIns="228600"/>
+          <a:bodyPr wrap="square" lIns="228600" tIns="228600" rIns="228600" bIns="228600" rtlCol="0" anchor="ctr"/>
           <a:lstStyle/>
           <a:p>
             <a:pPr algn="ctr">
@@ -7628,7 +8196,7 @@
               </a:spcAft>
             </a:pPr>
             <a:r>
-              <a:rPr b="1" sz="1450">
+              <a:rPr sz="1450" b="1">
                 <a:solidFill>
                   <a:srgbClr val="0F172A"/>
                 </a:solidFill>
@@ -7637,7 +8205,7 @@
               <a:t>Distributions asymétriques : </a:t>
             </a:r>
             <a:r>
-              <a:rPr b="0" sz="1400">
+              <a:rPr sz="1400" b="0">
                 <a:solidFill>
                   <a:srgbClr val="475569"/>
                 </a:solidFill>
@@ -7653,7 +8221,7 @@
               </a:spcAft>
             </a:pPr>
             <a:r>
-              <a:rPr b="1" sz="1450">
+              <a:rPr sz="1450" b="1">
                 <a:solidFill>
                   <a:srgbClr val="0F172A"/>
                 </a:solidFill>
@@ -7662,7 +8230,7 @@
               <a:t>Borne théorique ultime : </a:t>
             </a:r>
             <a:r>
-              <a:rPr b="0" sz="1400">
+              <a:rPr sz="1400" b="0">
                 <a:solidFill>
                   <a:srgbClr val="475569"/>
                 </a:solidFill>
@@ -7678,7 +8246,7 @@
               </a:spcAft>
             </a:pPr>
             <a:r>
-              <a:rPr b="1" sz="1450">
+              <a:rPr sz="1450" b="1">
                 <a:solidFill>
                   <a:srgbClr val="0F172A"/>
                 </a:solidFill>
@@ -7687,7 +8255,7 @@
               <a:t>Résultat clé : </a:t>
             </a:r>
             <a:r>
-              <a:rPr b="0" sz="1400">
+              <a:rPr sz="1400" b="0">
                 <a:solidFill>
                   <a:srgbClr val="475569"/>
                 </a:solidFill>
@@ -7703,7 +8271,7 @@
               </a:spcAft>
             </a:pPr>
             <a:r>
-              <a:rPr b="1" sz="1450">
+              <a:rPr sz="1450" b="1">
                 <a:solidFill>
                   <a:srgbClr val="0F172A"/>
                 </a:solidFill>
@@ -7712,7 +8280,7 @@
               <a:t>Robustesse aux pistons RMS : </a:t>
             </a:r>
             <a:r>
-              <a:rPr b="0" sz="1400">
+              <a:rPr sz="1400" b="0">
                 <a:solidFill>
                   <a:srgbClr val="475569"/>
                 </a:solidFill>
@@ -7728,7 +8296,7 @@
               </a:spcAft>
             </a:pPr>
             <a:r>
-              <a:rPr b="1" sz="1450">
+              <a:rPr sz="1450" b="1">
                 <a:solidFill>
                   <a:srgbClr val="0F172A"/>
                 </a:solidFill>
@@ -7737,7 +8305,7 @@
               <a:t>Avantage pratique : </a:t>
             </a:r>
             <a:r>
-              <a:rPr b="0" sz="1400">
+              <a:rPr sz="1400" b="0">
                 <a:solidFill>
                   <a:srgbClr val="475569"/>
                 </a:solidFill>
@@ -7790,6 +8358,7 @@
           <a:lstStyle/>
           <a:p>
             <a:pPr algn="ctr"/>
+            <a:endParaRPr/>
           </a:p>
         </p:txBody>
       </p:sp>
@@ -7834,7 +8403,7 @@
           <a:noFill/>
         </p:spPr>
         <p:txBody>
-          <a:bodyPr wrap="square" lIns="0" rIns="0" tIns="0" bIns="0">
+          <a:bodyPr wrap="square" lIns="0" tIns="0" rIns="0" bIns="0">
             <a:spAutoFit/>
           </a:bodyPr>
           <a:lstStyle/>
@@ -7891,7 +8460,7 @@
           </a:fontRef>
         </p:style>
         <p:txBody>
-          <a:bodyPr rtlCol="0" anchor="ctr" wrap="square" lIns="182880" tIns="109728" rIns="182880" bIns="91440"/>
+          <a:bodyPr wrap="square" lIns="182880" tIns="109728" rIns="182880" bIns="91440" rtlCol="0" anchor="ctr"/>
           <a:lstStyle/>
           <a:p>
             <a:pPr algn="ctr">
@@ -7926,7 +8495,7 @@
 </file>
 
 <file path=ppt/slides/slide5.xml><?xml version="1.0" encoding="utf-8"?>
-<p:sld xmlns:a="http://schemas.openxmlformats.org/drawingml/2006/main" xmlns:p="http://schemas.openxmlformats.org/presentationml/2006/main" xmlns:r="http://schemas.openxmlformats.org/officeDocument/2006/relationships">
+<p:sld xmlns:a="http://schemas.openxmlformats.org/drawingml/2006/main" xmlns:r="http://schemas.openxmlformats.org/officeDocument/2006/relationships" xmlns:p="http://schemas.openxmlformats.org/presentationml/2006/main">
   <p:cSld>
     <p:spTree>
       <p:nvGrpSpPr>
@@ -7934,7 +8503,14 @@
         <p:cNvGrpSpPr/>
         <p:nvPr/>
       </p:nvGrpSpPr>
-      <p:grpSpPr/>
+      <p:grpSpPr>
+        <a:xfrm>
+          <a:off x="0" y="0"/>
+          <a:ext cx="0" cy="0"/>
+          <a:chOff x="0" y="0"/>
+          <a:chExt cx="0" cy="0"/>
+        </a:xfrm>
+      </p:grpSpPr>
       <p:sp>
         <p:nvSpPr>
           <p:cNvPr id="2" name="Rounded Rectangle 1"/>
@@ -7973,7 +8549,7 @@
           </a:fontRef>
         </p:style>
         <p:txBody>
-          <a:bodyPr rtlCol="0" anchor="ctr" wrap="square" lIns="0" rIns="0" tIns="0" bIns="0"/>
+          <a:bodyPr wrap="square" lIns="0" tIns="0" rIns="0" bIns="0" rtlCol="0" anchor="ctr"/>
           <a:lstStyle/>
           <a:p>
             <a:pPr algn="ctr">
@@ -8007,7 +8583,7 @@
           <a:noFill/>
         </p:spPr>
         <p:txBody>
-          <a:bodyPr wrap="square" lIns="0" rIns="0" tIns="0" bIns="0">
+          <a:bodyPr wrap="square" lIns="0" tIns="0" rIns="0" bIns="0">
             <a:spAutoFit/>
           </a:bodyPr>
           <a:lstStyle/>
@@ -8043,7 +8619,7 @@
           <a:noFill/>
         </p:spPr>
         <p:txBody>
-          <a:bodyPr wrap="none" lIns="0" rIns="0" tIns="0" bIns="0">
+          <a:bodyPr wrap="none" lIns="0" tIns="0" rIns="0" bIns="0">
             <a:spAutoFit/>
           </a:bodyPr>
           <a:lstStyle/>
@@ -8079,7 +8655,7 @@
           <a:noFill/>
         </p:spPr>
         <p:txBody>
-          <a:bodyPr wrap="none" lIns="0" rIns="0" tIns="0" bIns="0">
+          <a:bodyPr wrap="none" lIns="0" tIns="0" rIns="0" bIns="0">
             <a:spAutoFit/>
           </a:bodyPr>
           <a:lstStyle/>
@@ -8136,7 +8712,7 @@
           </a:fontRef>
         </p:style>
         <p:txBody>
-          <a:bodyPr rtlCol="0" anchor="ctr" wrap="square" lIns="228600" tIns="228600" rIns="228600" bIns="228600"/>
+          <a:bodyPr wrap="square" lIns="228600" tIns="228600" rIns="228600" bIns="228600" rtlCol="0" anchor="ctr"/>
           <a:lstStyle/>
           <a:p>
             <a:pPr algn="ctr">
@@ -8145,7 +8721,7 @@
               </a:spcAft>
             </a:pPr>
             <a:r>
-              <a:rPr b="1" sz="1450">
+              <a:rPr sz="1450" b="1">
                 <a:solidFill>
                   <a:srgbClr val="0F172A"/>
                 </a:solidFill>
@@ -8154,7 +8730,7 @@
               <a:t>Au-delà du monochromatique : </a:t>
             </a:r>
             <a:r>
-              <a:rPr b="0" sz="1400">
+              <a:rPr sz="1400" b="0">
                 <a:solidFill>
                   <a:srgbClr val="475569"/>
                 </a:solidFill>
@@ -8170,7 +8746,7 @@
               </a:spcAft>
             </a:pPr>
             <a:r>
-              <a:rPr b="1" sz="1450">
+              <a:rPr sz="1450" b="1">
                 <a:solidFill>
                   <a:srgbClr val="0F172A"/>
                 </a:solidFill>
@@ -8179,7 +8755,7 @@
               <a:t>Bande étroite (Δλ ≤ 100 nm) : </a:t>
             </a:r>
             <a:r>
-              <a:rPr b="0" sz="1400">
+              <a:rPr sz="1400" b="0">
                 <a:solidFill>
                   <a:srgbClr val="475569"/>
                 </a:solidFill>
@@ -8195,7 +8771,7 @@
               </a:spcAft>
             </a:pPr>
             <a:r>
-              <a:rPr b="1" sz="1450">
+              <a:rPr sz="1450" b="1">
                 <a:solidFill>
                   <a:srgbClr val="0F172A"/>
                 </a:solidFill>
@@ -8204,7 +8780,7 @@
               <a:t>Bande large (~ 1 µm) : </a:t>
             </a:r>
             <a:r>
-              <a:rPr b="0" sz="1400">
+              <a:rPr sz="1400" b="0">
                 <a:solidFill>
                   <a:srgbClr val="475569"/>
                 </a:solidFill>
@@ -8220,7 +8796,7 @@
               </a:spcAft>
             </a:pPr>
             <a:r>
-              <a:rPr b="1" sz="1450">
+              <a:rPr sz="1450" b="1">
                 <a:solidFill>
                   <a:srgbClr val="0F172A"/>
                 </a:solidFill>
@@ -8229,7 +8805,7 @@
               <a:t>Bilan pratique : </a:t>
             </a:r>
             <a:r>
-              <a:rPr b="0" sz="1400">
+              <a:rPr sz="1400" b="0">
                 <a:solidFill>
                   <a:srgbClr val="475569"/>
                 </a:solidFill>
@@ -8282,6 +8858,7 @@
           <a:lstStyle/>
           <a:p>
             <a:pPr algn="ctr"/>
+            <a:endParaRPr/>
           </a:p>
         </p:txBody>
       </p:sp>
@@ -8326,7 +8903,7 @@
           <a:noFill/>
         </p:spPr>
         <p:txBody>
-          <a:bodyPr wrap="square" lIns="0" rIns="0" tIns="0" bIns="0">
+          <a:bodyPr wrap="square" lIns="0" tIns="0" rIns="0" bIns="0">
             <a:spAutoFit/>
           </a:bodyPr>
           <a:lstStyle/>
@@ -8383,7 +8960,7 @@
           </a:fontRef>
         </p:style>
         <p:txBody>
-          <a:bodyPr rtlCol="0" anchor="ctr" wrap="square" lIns="182880" tIns="109728" rIns="182880" bIns="91440"/>
+          <a:bodyPr wrap="square" lIns="182880" tIns="109728" rIns="182880" bIns="91440" rtlCol="0" anchor="ctr"/>
           <a:lstStyle/>
           <a:p>
             <a:pPr algn="ctr">
@@ -8418,7 +8995,7 @@
 </file>
 
 <file path=ppt/slides/slide6.xml><?xml version="1.0" encoding="utf-8"?>
-<p:sld xmlns:a="http://schemas.openxmlformats.org/drawingml/2006/main" xmlns:p="http://schemas.openxmlformats.org/presentationml/2006/main" xmlns:r="http://schemas.openxmlformats.org/officeDocument/2006/relationships">
+<p:sld xmlns:a="http://schemas.openxmlformats.org/drawingml/2006/main" xmlns:r="http://schemas.openxmlformats.org/officeDocument/2006/relationships" xmlns:p="http://schemas.openxmlformats.org/presentationml/2006/main">
   <p:cSld>
     <p:spTree>
       <p:nvGrpSpPr>
@@ -8426,7 +9003,14 @@
         <p:cNvGrpSpPr/>
         <p:nvPr/>
       </p:nvGrpSpPr>
-      <p:grpSpPr/>
+      <p:grpSpPr>
+        <a:xfrm>
+          <a:off x="0" y="0"/>
+          <a:ext cx="0" cy="0"/>
+          <a:chOff x="0" y="0"/>
+          <a:chExt cx="0" cy="0"/>
+        </a:xfrm>
+      </p:grpSpPr>
       <p:sp>
         <p:nvSpPr>
           <p:cNvPr id="2" name="Rounded Rectangle 1"/>
@@ -8465,7 +9049,7 @@
           </a:fontRef>
         </p:style>
         <p:txBody>
-          <a:bodyPr rtlCol="0" anchor="ctr" wrap="square" lIns="0" rIns="0" tIns="0" bIns="0"/>
+          <a:bodyPr wrap="square" lIns="0" tIns="0" rIns="0" bIns="0" rtlCol="0" anchor="ctr"/>
           <a:lstStyle/>
           <a:p>
             <a:pPr algn="ctr">
@@ -8499,7 +9083,7 @@
           <a:noFill/>
         </p:spPr>
         <p:txBody>
-          <a:bodyPr wrap="square" lIns="0" rIns="0" tIns="0" bIns="0">
+          <a:bodyPr wrap="square" lIns="0" tIns="0" rIns="0" bIns="0">
             <a:spAutoFit/>
           </a:bodyPr>
           <a:lstStyle/>
@@ -8535,7 +9119,7 @@
           <a:noFill/>
         </p:spPr>
         <p:txBody>
-          <a:bodyPr wrap="none" lIns="0" rIns="0" tIns="0" bIns="0">
+          <a:bodyPr wrap="none" lIns="0" tIns="0" rIns="0" bIns="0">
             <a:spAutoFit/>
           </a:bodyPr>
           <a:lstStyle/>
@@ -8571,7 +9155,7 @@
           <a:noFill/>
         </p:spPr>
         <p:txBody>
-          <a:bodyPr wrap="none" lIns="0" rIns="0" tIns="0" bIns="0">
+          <a:bodyPr wrap="none" lIns="0" tIns="0" rIns="0" bIns="0">
             <a:spAutoFit/>
           </a:bodyPr>
           <a:lstStyle/>
@@ -8628,7 +9212,7 @@
           </a:fontRef>
         </p:style>
         <p:txBody>
-          <a:bodyPr rtlCol="0" anchor="ctr" wrap="square" lIns="228600" tIns="228600" rIns="228600" bIns="228600"/>
+          <a:bodyPr wrap="square" lIns="228600" tIns="228600" rIns="228600" bIns="228600" rtlCol="0" anchor="ctr"/>
           <a:lstStyle/>
           <a:p>
             <a:pPr algn="ctr">
@@ -8637,7 +9221,7 @@
               </a:spcAft>
             </a:pPr>
             <a:r>
-              <a:rPr b="1" sz="1450">
+              <a:rPr sz="1450" b="1">
                 <a:solidFill>
                   <a:srgbClr val="0F172A"/>
                 </a:solidFill>
@@ -8646,7 +9230,7 @@
               <a:t>Banc optique photonique : </a:t>
             </a:r>
             <a:r>
-              <a:rPr b="0" sz="1400">
+              <a:rPr sz="1400" b="0">
                 <a:solidFill>
                   <a:srgbClr val="475569"/>
                 </a:solidFill>
@@ -8662,7 +9246,7 @@
               </a:spcAft>
             </a:pPr>
             <a:r>
-              <a:rPr b="1" sz="1450">
+              <a:rPr sz="1450" b="1">
                 <a:solidFill>
                   <a:srgbClr val="0F172A"/>
                 </a:solidFill>
@@ -8671,7 +9255,7 @@
               <a:t>PHOBos (Python OOP) : </a:t>
             </a:r>
             <a:r>
-              <a:rPr b="0" sz="1400">
+              <a:rPr sz="1400" b="0">
                 <a:solidFill>
                   <a:srgbClr val="475569"/>
                 </a:solidFill>
@@ -8687,7 +9271,7 @@
               </a:spcAft>
             </a:pPr>
             <a:r>
-              <a:rPr b="1" sz="1450">
+              <a:rPr sz="1450" b="1">
                 <a:solidFill>
                   <a:srgbClr val="0F172A"/>
                 </a:solidFill>
@@ -8696,7 +9280,7 @@
               <a:t>Pilotes matériels unifiés : </a:t>
             </a:r>
             <a:r>
-              <a:rPr b="0" sz="1400">
+              <a:rPr sz="1400" b="0">
                 <a:solidFill>
                   <a:srgbClr val="475569"/>
                 </a:solidFill>
@@ -8712,7 +9296,7 @@
               </a:spcAft>
             </a:pPr>
             <a:r>
-              <a:rPr b="1" sz="1450">
+              <a:rPr sz="1450" b="1">
                 <a:solidFill>
                   <a:srgbClr val="0F172A"/>
                 </a:solidFill>
@@ -8721,7 +9305,7 @@
               <a:t>Automatisation complète : </a:t>
             </a:r>
             <a:r>
-              <a:rPr b="0" sz="1400">
+              <a:rPr sz="1400" b="0">
                 <a:solidFill>
                   <a:srgbClr val="475569"/>
                 </a:solidFill>
@@ -8737,7 +9321,7 @@
               </a:spcAft>
             </a:pPr>
             <a:r>
-              <a:rPr b="1" sz="1450">
+              <a:rPr sz="1450" b="1">
                 <a:solidFill>
                   <a:srgbClr val="0F172A"/>
                 </a:solidFill>
@@ -8746,7 +9330,7 @@
               <a:t>Utilitaire PltEdit : </a:t>
             </a:r>
             <a:r>
-              <a:rPr b="0" sz="1400">
+              <a:rPr sz="1400" b="0">
                 <a:solidFill>
                   <a:srgbClr val="475569"/>
                 </a:solidFill>
@@ -8799,6 +9383,7 @@
           <a:lstStyle/>
           <a:p>
             <a:pPr algn="ctr"/>
+            <a:endParaRPr/>
           </a:p>
         </p:txBody>
       </p:sp>
@@ -8843,7 +9428,7 @@
           <a:noFill/>
         </p:spPr>
         <p:txBody>
-          <a:bodyPr wrap="square" lIns="0" rIns="0" tIns="0" bIns="0">
+          <a:bodyPr wrap="square" lIns="0" tIns="0" rIns="0" bIns="0">
             <a:spAutoFit/>
           </a:bodyPr>
           <a:lstStyle/>
@@ -8900,7 +9485,7 @@
           </a:fontRef>
         </p:style>
         <p:txBody>
-          <a:bodyPr rtlCol="0" anchor="ctr" wrap="square" lIns="182880" tIns="109728" rIns="182880" bIns="91440"/>
+          <a:bodyPr wrap="square" lIns="182880" tIns="109728" rIns="182880" bIns="91440" rtlCol="0" anchor="ctr"/>
           <a:lstStyle/>
           <a:p>
             <a:pPr algn="ctr">
@@ -8935,7 +9520,7 @@
 </file>
 
 <file path=ppt/slides/slide7.xml><?xml version="1.0" encoding="utf-8"?>
-<p:sld xmlns:a="http://schemas.openxmlformats.org/drawingml/2006/main" xmlns:p="http://schemas.openxmlformats.org/presentationml/2006/main" xmlns:r="http://schemas.openxmlformats.org/officeDocument/2006/relationships">
+<p:sld xmlns:a="http://schemas.openxmlformats.org/drawingml/2006/main" xmlns:r="http://schemas.openxmlformats.org/officeDocument/2006/relationships" xmlns:p="http://schemas.openxmlformats.org/presentationml/2006/main">
   <p:cSld>
     <p:spTree>
       <p:nvGrpSpPr>
@@ -8943,7 +9528,14 @@
         <p:cNvGrpSpPr/>
         <p:nvPr/>
       </p:nvGrpSpPr>
-      <p:grpSpPr/>
+      <p:grpSpPr>
+        <a:xfrm>
+          <a:off x="0" y="0"/>
+          <a:ext cx="0" cy="0"/>
+          <a:chOff x="0" y="0"/>
+          <a:chExt cx="0" cy="0"/>
+        </a:xfrm>
+      </p:grpSpPr>
       <p:sp>
         <p:nvSpPr>
           <p:cNvPr id="2" name="Rounded Rectangle 1"/>
@@ -8982,7 +9574,7 @@
           </a:fontRef>
         </p:style>
         <p:txBody>
-          <a:bodyPr rtlCol="0" anchor="ctr" wrap="square" lIns="0" rIns="0" tIns="0" bIns="0"/>
+          <a:bodyPr wrap="square" lIns="0" tIns="0" rIns="0" bIns="0" rtlCol="0" anchor="ctr"/>
           <a:lstStyle/>
           <a:p>
             <a:pPr algn="ctr">
@@ -9016,7 +9608,7 @@
           <a:noFill/>
         </p:spPr>
         <p:txBody>
-          <a:bodyPr wrap="square" lIns="0" rIns="0" tIns="0" bIns="0">
+          <a:bodyPr wrap="square" lIns="0" tIns="0" rIns="0" bIns="0">
             <a:spAutoFit/>
           </a:bodyPr>
           <a:lstStyle/>
@@ -9052,7 +9644,7 @@
           <a:noFill/>
         </p:spPr>
         <p:txBody>
-          <a:bodyPr wrap="none" lIns="0" rIns="0" tIns="0" bIns="0">
+          <a:bodyPr wrap="none" lIns="0" tIns="0" rIns="0" bIns="0">
             <a:spAutoFit/>
           </a:bodyPr>
           <a:lstStyle/>
@@ -9088,7 +9680,7 @@
           <a:noFill/>
         </p:spPr>
         <p:txBody>
-          <a:bodyPr wrap="none" lIns="0" rIns="0" tIns="0" bIns="0">
+          <a:bodyPr wrap="none" lIns="0" tIns="0" rIns="0" bIns="0">
             <a:spAutoFit/>
           </a:bodyPr>
           <a:lstStyle/>
@@ -9145,7 +9737,7 @@
           </a:fontRef>
         </p:style>
         <p:txBody>
-          <a:bodyPr rtlCol="0" anchor="ctr" wrap="square" lIns="228600" tIns="228600" rIns="228600" bIns="228600"/>
+          <a:bodyPr wrap="square" lIns="228600" tIns="228600" rIns="228600" bIns="228600" rtlCol="0" anchor="ctr"/>
           <a:lstStyle/>
           <a:p>
             <a:pPr algn="ctr">
@@ -9154,7 +9746,7 @@
               </a:spcAft>
             </a:pPr>
             <a:r>
-              <a:rPr b="1" sz="1450">
+              <a:rPr sz="1450" b="1">
                 <a:solidFill>
                   <a:srgbClr val="0F172A"/>
                 </a:solidFill>
@@ -9163,7 +9755,7 @@
               <a:t>Architecture testée : </a:t>
             </a:r>
             <a:r>
-              <a:rPr b="0" sz="1400">
+              <a:rPr sz="1400" b="0">
                 <a:solidFill>
                   <a:srgbClr val="475569"/>
                 </a:solidFill>
@@ -9179,7 +9771,7 @@
               </a:spcAft>
             </a:pPr>
             <a:r>
-              <a:rPr b="1" sz="1450">
+              <a:rPr sz="1450" b="1">
                 <a:solidFill>
                   <a:srgbClr val="0F172A"/>
                 </a:solidFill>
@@ -9188,7 +9780,7 @@
               <a:t>Algorithme Hooke &amp; Jeeves : </a:t>
             </a:r>
             <a:r>
-              <a:rPr b="0" sz="1400">
+              <a:rPr sz="1400" b="0">
                 <a:solidFill>
                   <a:srgbClr val="475569"/>
                 </a:solidFill>
@@ -9204,7 +9796,7 @@
               </a:spcAft>
             </a:pPr>
             <a:r>
-              <a:rPr b="1" sz="1450">
+              <a:rPr sz="1450" b="1">
                 <a:solidFill>
                   <a:srgbClr val="0F172A"/>
                 </a:solidFill>
@@ -9213,7 +9805,7 @@
               <a:t>Null depth obtenu : </a:t>
             </a:r>
             <a:r>
-              <a:rPr b="0" sz="1400">
+              <a:rPr sz="1400" b="0">
                 <a:solidFill>
                   <a:srgbClr val="475569"/>
                 </a:solidFill>
@@ -9229,7 +9821,7 @@
               </a:spcAft>
             </a:pPr>
             <a:r>
-              <a:rPr b="1" sz="1450">
+              <a:rPr sz="1450" b="1">
                 <a:solidFill>
                   <a:srgbClr val="0F172A"/>
                 </a:solidFill>
@@ -9238,7 +9830,7 @@
               <a:t>Progrès notable : </a:t>
             </a:r>
             <a:r>
-              <a:rPr b="0" sz="1400">
+              <a:rPr sz="1400" b="0">
                 <a:solidFill>
                   <a:srgbClr val="475569"/>
                 </a:solidFill>
@@ -9254,7 +9846,7 @@
               </a:spcAft>
             </a:pPr>
             <a:r>
-              <a:rPr b="1" sz="1450">
+              <a:rPr sz="1450" b="1">
                 <a:solidFill>
                   <a:srgbClr val="0F172A"/>
                 </a:solidFill>
@@ -9263,7 +9855,7 @@
               <a:t>Stabilité : </a:t>
             </a:r>
             <a:r>
-              <a:rPr b="0" sz="1400">
+              <a:rPr sz="1400" b="0">
                 <a:solidFill>
                   <a:srgbClr val="475569"/>
                 </a:solidFill>
@@ -9316,6 +9908,7 @@
           <a:lstStyle/>
           <a:p>
             <a:pPr algn="ctr"/>
+            <a:endParaRPr/>
           </a:p>
         </p:txBody>
       </p:sp>
@@ -9360,7 +9953,7 @@
           <a:noFill/>
         </p:spPr>
         <p:txBody>
-          <a:bodyPr wrap="square" lIns="0" rIns="0" tIns="0" bIns="0">
+          <a:bodyPr wrap="square" lIns="0" tIns="0" rIns="0" bIns="0">
             <a:spAutoFit/>
           </a:bodyPr>
           <a:lstStyle/>
@@ -9417,7 +10010,7 @@
           </a:fontRef>
         </p:style>
         <p:txBody>
-          <a:bodyPr rtlCol="0" anchor="ctr" wrap="square" lIns="182880" tIns="109728" rIns="182880" bIns="91440"/>
+          <a:bodyPr wrap="square" lIns="182880" tIns="109728" rIns="182880" bIns="91440" rtlCol="0" anchor="ctr"/>
           <a:lstStyle/>
           <a:p>
             <a:pPr algn="ctr">
@@ -9452,7 +10045,7 @@
 </file>
 
 <file path=ppt/slides/slide8.xml><?xml version="1.0" encoding="utf-8"?>
-<p:sld xmlns:a="http://schemas.openxmlformats.org/drawingml/2006/main" xmlns:p="http://schemas.openxmlformats.org/presentationml/2006/main" xmlns:r="http://schemas.openxmlformats.org/officeDocument/2006/relationships">
+<p:sld xmlns:a="http://schemas.openxmlformats.org/drawingml/2006/main" xmlns:r="http://schemas.openxmlformats.org/officeDocument/2006/relationships" xmlns:p="http://schemas.openxmlformats.org/presentationml/2006/main">
   <p:cSld>
     <p:spTree>
       <p:nvGrpSpPr>
@@ -9460,7 +10053,14 @@
         <p:cNvGrpSpPr/>
         <p:nvPr/>
       </p:nvGrpSpPr>
-      <p:grpSpPr/>
+      <p:grpSpPr>
+        <a:xfrm>
+          <a:off x="0" y="0"/>
+          <a:ext cx="0" cy="0"/>
+          <a:chOff x="0" y="0"/>
+          <a:chExt cx="0" cy="0"/>
+        </a:xfrm>
+      </p:grpSpPr>
       <p:sp>
         <p:nvSpPr>
           <p:cNvPr id="2" name="Rounded Rectangle 1"/>
@@ -9499,7 +10099,7 @@
           </a:fontRef>
         </p:style>
         <p:txBody>
-          <a:bodyPr rtlCol="0" anchor="ctr" wrap="square" lIns="0" rIns="0" tIns="0" bIns="0"/>
+          <a:bodyPr wrap="square" lIns="0" tIns="0" rIns="0" bIns="0" rtlCol="0" anchor="ctr"/>
           <a:lstStyle/>
           <a:p>
             <a:pPr algn="ctr">
@@ -9533,7 +10133,7 @@
           <a:noFill/>
         </p:spPr>
         <p:txBody>
-          <a:bodyPr wrap="square" lIns="0" rIns="0" tIns="0" bIns="0">
+          <a:bodyPr wrap="square" lIns="0" tIns="0" rIns="0" bIns="0">
             <a:spAutoFit/>
           </a:bodyPr>
           <a:lstStyle/>
@@ -9569,7 +10169,7 @@
           <a:noFill/>
         </p:spPr>
         <p:txBody>
-          <a:bodyPr wrap="none" lIns="0" rIns="0" tIns="0" bIns="0">
+          <a:bodyPr wrap="none" lIns="0" tIns="0" rIns="0" bIns="0">
             <a:spAutoFit/>
           </a:bodyPr>
           <a:lstStyle/>
@@ -9605,7 +10205,7 @@
           <a:noFill/>
         </p:spPr>
         <p:txBody>
-          <a:bodyPr wrap="none" lIns="0" rIns="0" tIns="0" bIns="0">
+          <a:bodyPr wrap="none" lIns="0" tIns="0" rIns="0" bIns="0">
             <a:spAutoFit/>
           </a:bodyPr>
           <a:lstStyle/>
@@ -9662,7 +10262,7 @@
           </a:fontRef>
         </p:style>
         <p:txBody>
-          <a:bodyPr rtlCol="0" anchor="ctr" wrap="square" lIns="228600" tIns="228600" rIns="228600" bIns="228600"/>
+          <a:bodyPr wrap="square" lIns="228600" tIns="228600" rIns="228600" bIns="228600" rtlCol="0" anchor="ctr"/>
           <a:lstStyle/>
           <a:p>
             <a:pPr algn="ctr">
@@ -9671,7 +10271,7 @@
               </a:spcAft>
             </a:pPr>
             <a:r>
-              <a:rPr b="1" sz="1450">
+              <a:rPr sz="1450" b="1">
                 <a:solidFill>
                   <a:srgbClr val="0F172A"/>
                 </a:solidFill>
@@ -9680,7 +10280,7 @@
               <a:t>Scan systématique : </a:t>
             </a:r>
             <a:r>
-              <a:rPr b="0" sz="1400">
+              <a:rPr sz="1400" b="0">
                 <a:solidFill>
                   <a:srgbClr val="475569"/>
                 </a:solidFill>
@@ -9696,7 +10296,7 @@
               </a:spcAft>
             </a:pPr>
             <a:r>
-              <a:rPr b="1" sz="1450">
+              <a:rPr sz="1450" b="1">
                 <a:solidFill>
                   <a:srgbClr val="0F172A"/>
                 </a:solidFill>
@@ -9705,7 +10305,7 @@
               <a:t>Modèle matriciel CMPCE : </a:t>
             </a:r>
             <a:r>
-              <a:rPr b="0" sz="1400">
+              <a:rPr sz="1400" b="0">
                 <a:solidFill>
                   <a:srgbClr val="475569"/>
                 </a:solidFill>
@@ -9721,7 +10321,7 @@
               </a:spcAft>
             </a:pPr>
             <a:r>
-              <a:rPr b="1" sz="1450">
+              <a:rPr sz="1450" b="1">
                 <a:solidFill>
                   <a:srgbClr val="0F172A"/>
                 </a:solidFill>
@@ -9730,7 +10330,7 @@
               <a:t>Phases retrouvées : </a:t>
             </a:r>
             <a:r>
-              <a:rPr b="0" sz="1400">
+              <a:rPr sz="1400" b="0">
                 <a:solidFill>
                   <a:srgbClr val="475569"/>
                 </a:solidFill>
@@ -9746,7 +10346,7 @@
               </a:spcAft>
             </a:pPr>
             <a:r>
-              <a:rPr b="1" sz="1450">
+              <a:rPr sz="1450" b="1">
                 <a:solidFill>
                   <a:srgbClr val="0F172A"/>
                 </a:solidFill>
@@ -9755,7 +10355,7 @@
               <a:t>Modulations d'interférence : </a:t>
             </a:r>
             <a:r>
-              <a:rPr b="0" sz="1400">
+              <a:rPr sz="1400" b="0">
                 <a:solidFill>
                   <a:srgbClr val="475569"/>
                 </a:solidFill>
@@ -9771,7 +10371,7 @@
               </a:spcAft>
             </a:pPr>
             <a:r>
-              <a:rPr b="1" sz="1450">
+              <a:rPr sz="1450" b="1">
                 <a:solidFill>
                   <a:srgbClr val="0F172A"/>
                 </a:solidFill>
@@ -9780,7 +10380,7 @@
               <a:t>Limite identifiée : </a:t>
             </a:r>
             <a:r>
-              <a:rPr b="0" sz="1400">
+              <a:rPr sz="1400" b="0">
                 <a:solidFill>
                   <a:srgbClr val="475569"/>
                 </a:solidFill>
@@ -9833,6 +10433,7 @@
           <a:lstStyle/>
           <a:p>
             <a:pPr algn="ctr"/>
+            <a:endParaRPr/>
           </a:p>
         </p:txBody>
       </p:sp>
@@ -9877,7 +10478,7 @@
           <a:noFill/>
         </p:spPr>
         <p:txBody>
-          <a:bodyPr wrap="square" lIns="0" rIns="0" tIns="0" bIns="0">
+          <a:bodyPr wrap="square" lIns="0" tIns="0" rIns="0" bIns="0">
             <a:spAutoFit/>
           </a:bodyPr>
           <a:lstStyle/>
@@ -9934,7 +10535,7 @@
           </a:fontRef>
         </p:style>
         <p:txBody>
-          <a:bodyPr rtlCol="0" anchor="ctr" wrap="square" lIns="182880" tIns="109728" rIns="182880" bIns="91440"/>
+          <a:bodyPr wrap="square" lIns="182880" tIns="109728" rIns="182880" bIns="91440" rtlCol="0" anchor="ctr"/>
           <a:lstStyle/>
           <a:p>
             <a:pPr algn="ctr">
@@ -9969,7 +10570,7 @@
 </file>
 
 <file path=ppt/slides/slide9.xml><?xml version="1.0" encoding="utf-8"?>
-<p:sld xmlns:a="http://schemas.openxmlformats.org/drawingml/2006/main" xmlns:p="http://schemas.openxmlformats.org/presentationml/2006/main" xmlns:r="http://schemas.openxmlformats.org/officeDocument/2006/relationships">
+<p:sld xmlns:a="http://schemas.openxmlformats.org/drawingml/2006/main" xmlns:r="http://schemas.openxmlformats.org/officeDocument/2006/relationships" xmlns:p="http://schemas.openxmlformats.org/presentationml/2006/main">
   <p:cSld>
     <p:spTree>
       <p:nvGrpSpPr>
@@ -9977,7 +10578,14 @@
         <p:cNvGrpSpPr/>
         <p:nvPr/>
       </p:nvGrpSpPr>
-      <p:grpSpPr/>
+      <p:grpSpPr>
+        <a:xfrm>
+          <a:off x="0" y="0"/>
+          <a:ext cx="0" cy="0"/>
+          <a:chOff x="0" y="0"/>
+          <a:chExt cx="0" cy="0"/>
+        </a:xfrm>
+      </p:grpSpPr>
       <p:sp>
         <p:nvSpPr>
           <p:cNvPr id="2" name="Rounded Rectangle 1"/>
@@ -10016,7 +10624,7 @@
           </a:fontRef>
         </p:style>
         <p:txBody>
-          <a:bodyPr rtlCol="0" anchor="ctr" wrap="square" lIns="0" rIns="0" tIns="0" bIns="0"/>
+          <a:bodyPr wrap="square" lIns="0" tIns="0" rIns="0" bIns="0" rtlCol="0" anchor="ctr"/>
           <a:lstStyle/>
           <a:p>
             <a:pPr algn="ctr">
@@ -10050,7 +10658,7 @@
           <a:noFill/>
         </p:spPr>
         <p:txBody>
-          <a:bodyPr wrap="square" lIns="0" rIns="0" tIns="0" bIns="0">
+          <a:bodyPr wrap="square" lIns="0" tIns="0" rIns="0" bIns="0">
             <a:spAutoFit/>
           </a:bodyPr>
           <a:lstStyle/>
@@ -10086,7 +10694,7 @@
           <a:noFill/>
         </p:spPr>
         <p:txBody>
-          <a:bodyPr wrap="none" lIns="0" rIns="0" tIns="0" bIns="0">
+          <a:bodyPr wrap="none" lIns="0" tIns="0" rIns="0" bIns="0">
             <a:spAutoFit/>
           </a:bodyPr>
           <a:lstStyle/>
@@ -10122,7 +10730,7 @@
           <a:noFill/>
         </p:spPr>
         <p:txBody>
-          <a:bodyPr wrap="none" lIns="0" rIns="0" tIns="0" bIns="0">
+          <a:bodyPr wrap="none" lIns="0" tIns="0" rIns="0" bIns="0">
             <a:spAutoFit/>
           </a:bodyPr>
           <a:lstStyle/>
@@ -10179,7 +10787,7 @@
           </a:fontRef>
         </p:style>
         <p:txBody>
-          <a:bodyPr rtlCol="0" anchor="ctr" wrap="square" lIns="228600" tIns="228600" rIns="228600" bIns="228600"/>
+          <a:bodyPr wrap="square" lIns="228600" tIns="228600" rIns="228600" bIns="228600" rtlCol="0" anchor="ctr"/>
           <a:lstStyle/>
           <a:p>
             <a:pPr algn="ctr">
@@ -10188,7 +10796,7 @@
               </a:spcAft>
             </a:pPr>
             <a:r>
-              <a:rPr b="1" sz="1450">
+              <a:rPr sz="1450" b="1">
                 <a:solidFill>
                   <a:srgbClr val="0F172A"/>
                 </a:solidFill>
@@ -10197,7 +10805,7 @@
               <a:t>Physique du capteur : </a:t>
             </a:r>
             <a:r>
-              <a:rPr b="0" sz="1400">
+              <a:rPr sz="1400" b="0">
                 <a:solidFill>
                   <a:srgbClr val="475569"/>
                 </a:solidFill>
@@ -10213,7 +10821,7 @@
               </a:spcAft>
             </a:pPr>
             <a:r>
-              <a:rPr b="1" sz="1450">
+              <a:rPr sz="1450" b="1">
                 <a:solidFill>
                   <a:srgbClr val="0F172A"/>
                 </a:solidFill>
@@ -10222,7 +10830,7 @@
               <a:t>Bruit réaliste : </a:t>
             </a:r>
             <a:r>
-              <a:rPr b="0" sz="1400">
+              <a:rPr sz="1400" b="0">
                 <a:solidFill>
                   <a:srgbClr val="475569"/>
                 </a:solidFill>
@@ -10238,7 +10846,7 @@
               </a:spcAft>
             </a:pPr>
             <a:r>
-              <a:rPr b="1" sz="1450">
+              <a:rPr sz="1450" b="1">
                 <a:solidFill>
                   <a:srgbClr val="0F172A"/>
                 </a:solidFill>
@@ -10247,7 +10855,7 @@
               <a:t>Injection du modèle CMPCE : </a:t>
             </a:r>
             <a:r>
-              <a:rPr b="0" sz="1400">
+              <a:rPr sz="1400" b="0">
                 <a:solidFill>
                   <a:srgbClr val="475569"/>
                 </a:solidFill>
@@ -10263,7 +10871,7 @@
               </a:spcAft>
             </a:pPr>
             <a:r>
-              <a:rPr b="1" sz="1450">
+              <a:rPr sz="1450" b="1">
                 <a:solidFill>
                   <a:srgbClr val="0F172A"/>
                 </a:solidFill>
@@ -10272,7 +10880,7 @@
               <a:t>Concordance spectaculaire : </a:t>
             </a:r>
             <a:r>
-              <a:rPr b="0" sz="1400">
+              <a:rPr sz="1400" b="0">
                 <a:solidFill>
                   <a:srgbClr val="475569"/>
                 </a:solidFill>
@@ -10288,7 +10896,7 @@
               </a:spcAft>
             </a:pPr>
             <a:r>
-              <a:rPr b="1" sz="1450">
+              <a:rPr sz="1450" b="1">
                 <a:solidFill>
                   <a:srgbClr val="0F172A"/>
                 </a:solidFill>
@@ -10297,7 +10905,7 @@
               <a:t>Jumeau numérique : </a:t>
             </a:r>
             <a:r>
-              <a:rPr b="0" sz="1400">
+              <a:rPr sz="1400" b="0">
                 <a:solidFill>
                   <a:srgbClr val="475569"/>
                 </a:solidFill>
@@ -10350,6 +10958,7 @@
           <a:lstStyle/>
           <a:p>
             <a:pPr algn="ctr"/>
+            <a:endParaRPr/>
           </a:p>
         </p:txBody>
       </p:sp>
@@ -10394,7 +11003,7 @@
           <a:noFill/>
         </p:spPr>
         <p:txBody>
-          <a:bodyPr wrap="square" lIns="0" rIns="0" tIns="0" bIns="0">
+          <a:bodyPr wrap="square" lIns="0" tIns="0" rIns="0" bIns="0">
             <a:spAutoFit/>
           </a:bodyPr>
           <a:lstStyle/>
@@ -10451,7 +11060,7 @@
           </a:fontRef>
         </p:style>
         <p:txBody>
-          <a:bodyPr rtlCol="0" anchor="ctr" wrap="square" lIns="182880" tIns="109728" rIns="182880" bIns="91440"/>
+          <a:bodyPr wrap="square" lIns="182880" tIns="109728" rIns="182880" bIns="91440" rtlCol="0" anchor="ctr"/>
           <a:lstStyle/>
           <a:p>
             <a:pPr algn="ctr">
